--- a/SteveMoody_SkillsBasedReverseEngineering.pptx
+++ b/SteveMoody_SkillsBasedReverseEngineering.pptx
@@ -259,7 +259,7 @@
   </p:defaultTextStyle>
   <p:extLst>
     <p:ext uri="GoogleSlidesCustomDataVersion2">
-      <go:slidesCustomData xmlns:go="http://customooxmlschemas.google.com/" r:id="rId22" roundtripDataSignature="AMtx7mg8hT1GSpvwKpPQj1lJ3s7Ci5Kk1A=="/>
+      <go:slidesCustomData xmlns:go="http://customooxmlschemas.google.com/" r:id="rId22" roundtripDataSignature="AMtx7mjrAFsqJ+7vyBlpkV6U7KunISF1hg=="/>
     </p:ext>
   </p:extLst>
 </p:presentation>
@@ -1948,22 +1948,26 @@
           </a:bodyPr>
           <a:lstStyle/>
           <a:p>
-            <a:pPr indent="0" lvl="0" marL="0" rtl="0" algn="l">
-              <a:lnSpc>
-                <a:spcPct val="100000"/>
-              </a:lnSpc>
-              <a:spcBef>
-                <a:spcPts val="0"/>
-              </a:spcBef>
-              <a:spcAft>
-                <a:spcPts val="0"/>
-              </a:spcAft>
+            <a:pPr indent="-228600" lvl="0" marL="457200" marR="0" rtl="0" algn="l">
+              <a:lnSpc>
+                <a:spcPct val="100000"/>
+              </a:lnSpc>
+              <a:spcBef>
+                <a:spcPts val="0"/>
+              </a:spcBef>
+              <a:spcAft>
+                <a:spcPts val="0"/>
+              </a:spcAft>
+              <a:buClr>
+                <a:srgbClr val="000000"/>
+              </a:buClr>
               <a:buSzPts val="1400"/>
+              <a:buFont typeface="Arial"/>
               <a:buNone/>
             </a:pPr>
             <a:r>
               <a:rPr lang="en-US"/>
-              <a:t>(~5 min for slides 9-10.) The framing: AI reads, humans verify. The goal is a blueprint that can drive the build, not just notes. Tool is GitHub Copilot in VS Code.</a:t>
+              <a:t>(~5 min for slides 9-11.) The framing: AI reads, humans verify. The goal is a blueprint that can drive the build, not just notes. Tool is GitHub Copilot in VS Code.</a:t>
             </a:r>
             <a:endParaRPr/>
           </a:p>
@@ -2114,22 +2118,26 @@
           </a:bodyPr>
           <a:lstStyle/>
           <a:p>
-            <a:pPr indent="0" lvl="0" marL="0" rtl="0" algn="l">
-              <a:lnSpc>
-                <a:spcPct val="100000"/>
-              </a:lnSpc>
-              <a:spcBef>
-                <a:spcPts val="0"/>
-              </a:spcBef>
-              <a:spcAft>
-                <a:spcPts val="0"/>
-              </a:spcAft>
+            <a:pPr indent="-228600" lvl="0" marL="457200" marR="0" rtl="0" algn="l">
+              <a:lnSpc>
+                <a:spcPct val="100000"/>
+              </a:lnSpc>
+              <a:spcBef>
+                <a:spcPts val="0"/>
+              </a:spcBef>
+              <a:spcAft>
+                <a:spcPts val="0"/>
+              </a:spcAft>
+              <a:buClr>
+                <a:srgbClr val="000000"/>
+              </a:buClr>
               <a:buSzPts val="1400"/>
+              <a:buFont typeface="Arial"/>
               <a:buNone/>
             </a:pPr>
             <a:r>
               <a:rPr lang="en-US"/>
-              <a:t>Walk left to right. Index: why dumping 600K lines in a prompt fails, so we mapped services, procs and dependencies. Skill file: what to look for - business rules, data flows, side effects, edge cases; ignore boilerplate. Standard doc: one template for every service and proc. Humans stay in the loop at review.</a:t>
+              <a:t>Walk left to right. Index: why dumping 600k+ lines in a prompt fails, so we mapped services, procs and dependencies. Skill file: what to look for - business rules, data flows, side effects, edge cases; ignore boilerplate. Standard doc: one template for every service and proc. Humans stay in the loop at review.</a:t>
             </a:r>
             <a:endParaRPr/>
           </a:p>
@@ -2446,22 +2454,26 @@
           </a:bodyPr>
           <a:lstStyle/>
           <a:p>
-            <a:pPr indent="0" lvl="0" marL="0" rtl="0" algn="l">
-              <a:lnSpc>
-                <a:spcPct val="100000"/>
-              </a:lnSpc>
-              <a:spcBef>
-                <a:spcPts val="0"/>
-              </a:spcBef>
-              <a:spcAft>
-                <a:spcPts val="0"/>
-              </a:spcAft>
+            <a:pPr indent="-228600" lvl="0" marL="457200" marR="0" rtl="0" algn="l">
+              <a:lnSpc>
+                <a:spcPct val="100000"/>
+              </a:lnSpc>
+              <a:spcBef>
+                <a:spcPts val="0"/>
+              </a:spcBef>
+              <a:spcAft>
+                <a:spcPts val="0"/>
+              </a:spcAft>
+              <a:buClr>
+                <a:srgbClr val="000000"/>
+              </a:buClr>
               <a:buSzPts val="1400"/>
+              <a:buFont typeface="Arial"/>
               <a:buNone/>
             </a:pPr>
             <a:r>
               <a:rPr lang="en-US"/>
-              <a:t>ADD REAL NUMBERS here if you have them (time to understand a service, review time, docs produced). Keep claims to what you can defend.</a:t>
+              <a:t>(~3 min for slides 13-15.) Three payoffs: faster understanding, reviewable inputs, a repeatable method. Keep claims to what you can defend.</a:t>
             </a:r>
             <a:endParaRPr/>
           </a:p>
@@ -2542,7 +2554,7 @@
       </p:grpSpPr>
       <p:sp>
         <p:nvSpPr>
-          <p:cNvPr id="290" name="Google Shape;290;p14:notes"/>
+          <p:cNvPr id="290" name="Google Shape;290;p12:notes"/>
           <p:cNvSpPr/>
           <p:nvPr>
             <p:ph idx="2" type="sldImg"/>
@@ -2587,7 +2599,7 @@
       </p:sp>
       <p:sp>
         <p:nvSpPr>
-          <p:cNvPr id="291" name="Google Shape;291;p14:notes"/>
+          <p:cNvPr id="291" name="Google Shape;291;p12:notes"/>
           <p:cNvSpPr txBox="1"/>
           <p:nvPr>
             <p:ph idx="1" type="body"/>
@@ -2612,22 +2624,26 @@
           </a:bodyPr>
           <a:lstStyle/>
           <a:p>
-            <a:pPr indent="0" lvl="0" marL="0" rtl="0" algn="l">
-              <a:lnSpc>
-                <a:spcPct val="100000"/>
-              </a:lnSpc>
-              <a:spcBef>
-                <a:spcPts val="0"/>
-              </a:spcBef>
-              <a:spcAft>
-                <a:spcPts val="0"/>
-              </a:spcAft>
+            <a:pPr indent="-228600" lvl="0" marL="457200" marR="0" rtl="0" algn="l">
+              <a:lnSpc>
+                <a:spcPct val="100000"/>
+              </a:lnSpc>
+              <a:spcBef>
+                <a:spcPts val="0"/>
+              </a:spcBef>
+              <a:spcAft>
+                <a:spcPts val="0"/>
+              </a:spcAft>
+              <a:buClr>
+                <a:srgbClr val="000000"/>
+              </a:buClr>
               <a:buSzPts val="1400"/>
+              <a:buFont typeface="Arial"/>
               <a:buNone/>
             </a:pPr>
             <a:r>
               <a:rPr lang="en-US"/>
-              <a:t>(~3 min for slides 14-15.) Use real examples from your migration here, not from the demo service. Be specific: one implicit rule it missed, one Oracle behavior it misread.</a:t>
+              <a:t>Docs became the spec for the Databricks build. Copilot used the blueprint to generate new code. Metadata-driven ingestion fed directly from the findings.</a:t>
             </a:r>
             <a:endParaRPr/>
           </a:p>
@@ -2635,7 +2651,7 @@
       </p:sp>
       <p:sp>
         <p:nvSpPr>
-          <p:cNvPr id="292" name="Google Shape;292;p14:notes"/>
+          <p:cNvPr id="292" name="Google Shape;292;p12:notes"/>
           <p:cNvSpPr txBox="1"/>
           <p:nvPr>
             <p:ph idx="12" type="sldNum"/>
@@ -2694,7 +2710,7 @@
   <p:cSld>
     <p:spTree>
       <p:nvGrpSpPr>
-        <p:cNvPr id="305" name="Shape 305"/>
+        <p:cNvPr id="313" name="Shape 313"/>
         <p:cNvGrpSpPr/>
         <p:nvPr/>
       </p:nvGrpSpPr>
@@ -2708,7 +2724,7 @@
       </p:grpSpPr>
       <p:sp>
         <p:nvSpPr>
-          <p:cNvPr id="306" name="Google Shape;306;p12:notes"/>
+          <p:cNvPr id="314" name="Google Shape;314;p14:notes"/>
           <p:cNvSpPr/>
           <p:nvPr>
             <p:ph idx="2" type="sldImg"/>
@@ -2753,7 +2769,7 @@
       </p:sp>
       <p:sp>
         <p:nvSpPr>
-          <p:cNvPr id="307" name="Google Shape;307;p12:notes"/>
+          <p:cNvPr id="315" name="Google Shape;315;p14:notes"/>
           <p:cNvSpPr txBox="1"/>
           <p:nvPr>
             <p:ph idx="1" type="body"/>
@@ -2778,22 +2794,26 @@
           </a:bodyPr>
           <a:lstStyle/>
           <a:p>
-            <a:pPr indent="0" lvl="0" marL="0" rtl="0" algn="l">
-              <a:lnSpc>
-                <a:spcPct val="100000"/>
-              </a:lnSpc>
-              <a:spcBef>
-                <a:spcPts val="0"/>
-              </a:spcBef>
-              <a:spcAft>
-                <a:spcPts val="0"/>
-              </a:spcAft>
+            <a:pPr indent="-228600" lvl="0" marL="457200" marR="0" rtl="0" algn="l">
+              <a:lnSpc>
+                <a:spcPct val="100000"/>
+              </a:lnSpc>
+              <a:spcBef>
+                <a:spcPts val="0"/>
+              </a:spcBef>
+              <a:spcAft>
+                <a:spcPts val="0"/>
+              </a:spcAft>
+              <a:buClr>
+                <a:srgbClr val="000000"/>
+              </a:buClr>
               <a:buSzPts val="1400"/>
+              <a:buFont typeface="Arial"/>
               <a:buNone/>
             </a:pPr>
             <a:r>
               <a:rPr lang="en-US"/>
-              <a:t>(~3 min for slides 12-13.) Docs became the spec for the Databricks build. Copilot used the blueprint to generate new code. Metadata-driven ingestion fed directly from the findings.</a:t>
+              <a:t>Where we'd go next: more focused skills, an agent that runs them across the index, and evidence and checks built in (cited claims, a reviewer agent, automated validation). Tie each back to what went wrong in the ad hoc phase.</a:t>
             </a:r>
             <a:endParaRPr/>
           </a:p>
@@ -2801,7 +2821,7 @@
       </p:sp>
       <p:sp>
         <p:nvSpPr>
-          <p:cNvPr id="308" name="Google Shape;308;p12:notes"/>
+          <p:cNvPr id="316" name="Google Shape;316;p14:notes"/>
           <p:cNvSpPr txBox="1"/>
           <p:nvPr>
             <p:ph idx="12" type="sldNum"/>
@@ -3220,6 +3240,10 @@
           <a:prstGeom prst="rect">
             <a:avLst/>
           </a:prstGeom>
+          <a:noFill/>
+          <a:ln>
+            <a:noFill/>
+          </a:ln>
         </p:spPr>
         <p:txBody>
           <a:bodyPr anchorCtr="0" anchor="t" bIns="45700" lIns="91425" spcFirstLastPara="1" rIns="91425" wrap="square" tIns="45700">
@@ -3227,17 +3251,26 @@
           </a:bodyPr>
           <a:lstStyle/>
           <a:p>
-            <a:pPr indent="0" lvl="0" marL="0" rtl="0" algn="l">
-              <a:spcBef>
-                <a:spcPts val="0"/>
-              </a:spcBef>
-              <a:spcAft>
-                <a:spcPts val="0"/>
-              </a:spcAft>
-              <a:buNone/>
-            </a:pPr>
-            <a:r>
-              <a:t/>
+            <a:pPr indent="-228600" lvl="0" marL="457200" marR="0" rtl="0" algn="l">
+              <a:lnSpc>
+                <a:spcPct val="100000"/>
+              </a:lnSpc>
+              <a:spcBef>
+                <a:spcPts val="0"/>
+              </a:spcBef>
+              <a:spcAft>
+                <a:spcPts val="0"/>
+              </a:spcAft>
+              <a:buClr>
+                <a:srgbClr val="000000"/>
+              </a:buClr>
+              <a:buSzPts val="1400"/>
+              <a:buFont typeface="Arial"/>
+              <a:buNone/>
+            </a:pPr>
+            <a:r>
+              <a:rPr lang="en-US"/>
+              <a:t>(~30 sec.) Quick intro: Lead Data Engineering Consultant at Concentrix. 25+ years of SQL, 15+ in data engineering, 10+ as a consultant. Currently on a renewable energy market data platform on Azure Databricks. Keep it short and move on.</a:t>
             </a:r>
             <a:endParaRPr/>
           </a:p>
@@ -3246,66 +3279,6 @@
       <p:sp>
         <p:nvSpPr>
           <p:cNvPr id="29" name="Google Shape;29;p23:notes"/>
-          <p:cNvSpPr/>
-          <p:nvPr>
-            <p:ph idx="2" type="sldImg"/>
-          </p:nvPr>
-        </p:nvSpPr>
-        <p:spPr>
-          <a:xfrm>
-            <a:off x="685800" y="1143000"/>
-            <a:ext cx="5486400" cy="3086100"/>
-          </a:xfrm>
-          <a:custGeom>
-            <a:rect b="b" l="l" r="r" t="t"/>
-            <a:pathLst>
-              <a:path extrusionOk="0" h="120000" w="120000">
-                <a:moveTo>
-                  <a:pt x="0" y="0"/>
-                </a:moveTo>
-                <a:lnTo>
-                  <a:pt x="120000" y="0"/>
-                </a:lnTo>
-                <a:lnTo>
-                  <a:pt x="120000" y="120000"/>
-                </a:lnTo>
-                <a:lnTo>
-                  <a:pt x="0" y="120000"/>
-                </a:lnTo>
-                <a:close/>
-              </a:path>
-            </a:pathLst>
-          </a:custGeom>
-        </p:spPr>
-      </p:sp>
-    </p:spTree>
-  </p:cSld>
-  <p:clrMapOvr>
-    <a:masterClrMapping/>
-  </p:clrMapOvr>
-</p:notes>
-</file>
-
-<file path=ppt/notesSlides/notesSlide3.xml><?xml version="1.0" encoding="utf-8"?>
-<p:notes xmlns:a="http://schemas.openxmlformats.org/drawingml/2006/main" xmlns:r="http://schemas.openxmlformats.org/officeDocument/2006/relationships" xmlns:mc="http://schemas.openxmlformats.org/markup-compatibility/2006" xmlns:mv="urn:schemas-microsoft-com:mac:vml" xmlns:p="http://schemas.openxmlformats.org/presentationml/2006/main" xmlns:c="http://schemas.openxmlformats.org/drawingml/2006/chart" xmlns:dgm="http://schemas.openxmlformats.org/drawingml/2006/diagram" xmlns:o="urn:schemas-microsoft-com:office:office" xmlns:v="urn:schemas-microsoft-com:vml" xmlns:pvml="urn:schemas-microsoft-com:office:powerpoint" xmlns:com="http://schemas.openxmlformats.org/drawingml/2006/compatibility" xmlns:p14="http://schemas.microsoft.com/office/powerpoint/2010/main" xmlns:p15="http://schemas.microsoft.com/office/powerpoint/2012/main" xmlns:ahyp="http://schemas.microsoft.com/office/drawing/2018/hyperlinkcolor" showMasterPhAnim="0" showMasterSp="0">
-  <p:cSld>
-    <p:spTree>
-      <p:nvGrpSpPr>
-        <p:cNvPr id="48" name="Shape 48"/>
-        <p:cNvGrpSpPr/>
-        <p:nvPr/>
-      </p:nvGrpSpPr>
-      <p:grpSpPr>
-        <a:xfrm>
-          <a:off x="0" y="0"/>
-          <a:ext cx="0" cy="0"/>
-          <a:chOff x="0" y="0"/>
-          <a:chExt cx="0" cy="0"/>
-        </a:xfrm>
-      </p:grpSpPr>
-      <p:sp>
-        <p:nvSpPr>
-          <p:cNvPr id="49" name="Google Shape;49;p2:notes"/>
           <p:cNvSpPr/>
           <p:nvPr>
             <p:ph idx="2" type="sldImg"/>
@@ -3348,102 +3321,6 @@
           </a:ln>
         </p:spPr>
       </p:sp>
-      <p:sp>
-        <p:nvSpPr>
-          <p:cNvPr id="50" name="Google Shape;50;p2:notes"/>
-          <p:cNvSpPr txBox="1"/>
-          <p:nvPr>
-            <p:ph idx="1" type="body"/>
-          </p:nvPr>
-        </p:nvSpPr>
-        <p:spPr>
-          <a:xfrm>
-            <a:off x="685800" y="4400550"/>
-            <a:ext cx="5486400" cy="3600450"/>
-          </a:xfrm>
-          <a:prstGeom prst="rect">
-            <a:avLst/>
-          </a:prstGeom>
-          <a:noFill/>
-          <a:ln>
-            <a:noFill/>
-          </a:ln>
-        </p:spPr>
-        <p:txBody>
-          <a:bodyPr anchorCtr="0" anchor="t" bIns="45700" lIns="91425" spcFirstLastPara="1" rIns="91425" wrap="square" tIns="45700">
-            <a:noAutofit/>
-          </a:bodyPr>
-          <a:lstStyle/>
-          <a:p>
-            <a:pPr indent="0" lvl="0" marL="0" rtl="0" algn="l">
-              <a:lnSpc>
-                <a:spcPct val="100000"/>
-              </a:lnSpc>
-              <a:spcBef>
-                <a:spcPts val="0"/>
-              </a:spcBef>
-              <a:spcAft>
-                <a:spcPts val="0"/>
-              </a:spcAft>
-              <a:buSzPts val="1400"/>
-              <a:buNone/>
-            </a:pPr>
-            <a:r>
-              <a:rPr lang="en-US"/>
-              <a:t>Four parts, one demo in the middle. Tell them what they can steal: the skill-file pattern, the index, the documentation standard.</a:t>
-            </a:r>
-            <a:endParaRPr/>
-          </a:p>
-        </p:txBody>
-      </p:sp>
-      <p:sp>
-        <p:nvSpPr>
-          <p:cNvPr id="51" name="Google Shape;51;p2:notes"/>
-          <p:cNvSpPr txBox="1"/>
-          <p:nvPr>
-            <p:ph idx="12" type="sldNum"/>
-          </p:nvPr>
-        </p:nvSpPr>
-        <p:spPr>
-          <a:xfrm>
-            <a:off x="3884613" y="8685213"/>
-            <a:ext cx="2971800" cy="458787"/>
-          </a:xfrm>
-          <a:prstGeom prst="rect">
-            <a:avLst/>
-          </a:prstGeom>
-          <a:noFill/>
-          <a:ln>
-            <a:noFill/>
-          </a:ln>
-        </p:spPr>
-        <p:txBody>
-          <a:bodyPr anchorCtr="0" anchor="b" bIns="45700" lIns="91425" spcFirstLastPara="1" rIns="91425" wrap="square" tIns="45700">
-            <a:noAutofit/>
-          </a:bodyPr>
-          <a:lstStyle/>
-          <a:p>
-            <a:pPr indent="0" lvl="0" marL="0" rtl="0" algn="r">
-              <a:lnSpc>
-                <a:spcPct val="100000"/>
-              </a:lnSpc>
-              <a:spcBef>
-                <a:spcPts val="0"/>
-              </a:spcBef>
-              <a:spcAft>
-                <a:spcPts val="0"/>
-              </a:spcAft>
-              <a:buSzPts val="1400"/>
-              <a:buNone/>
-            </a:pPr>
-            <a:fld id="{00000000-1234-1234-1234-123412341234}" type="slidenum">
-              <a:rPr lang="en-US"/>
-              <a:t>‹#›</a:t>
-            </a:fld>
-            <a:endParaRPr/>
-          </a:p>
-        </p:txBody>
-      </p:sp>
     </p:spTree>
   </p:cSld>
   <p:clrMapOvr>
@@ -3452,12 +3329,12 @@
 </p:notes>
 </file>
 
-<file path=ppt/notesSlides/notesSlide4.xml><?xml version="1.0" encoding="utf-8"?>
+<file path=ppt/notesSlides/notesSlide3.xml><?xml version="1.0" encoding="utf-8"?>
 <p:notes xmlns:a="http://schemas.openxmlformats.org/drawingml/2006/main" xmlns:r="http://schemas.openxmlformats.org/officeDocument/2006/relationships" xmlns:mc="http://schemas.openxmlformats.org/markup-compatibility/2006" xmlns:mv="urn:schemas-microsoft-com:mac:vml" xmlns:p="http://schemas.openxmlformats.org/presentationml/2006/main" xmlns:c="http://schemas.openxmlformats.org/drawingml/2006/chart" xmlns:dgm="http://schemas.openxmlformats.org/drawingml/2006/diagram" xmlns:o="urn:schemas-microsoft-com:office:office" xmlns:v="urn:schemas-microsoft-com:vml" xmlns:pvml="urn:schemas-microsoft-com:office:powerpoint" xmlns:com="http://schemas.openxmlformats.org/drawingml/2006/compatibility" xmlns:p14="http://schemas.microsoft.com/office/powerpoint/2010/main" xmlns:p15="http://schemas.microsoft.com/office/powerpoint/2012/main" xmlns:ahyp="http://schemas.microsoft.com/office/drawing/2018/hyperlinkcolor" showMasterPhAnim="0" showMasterSp="0">
   <p:cSld>
     <p:spTree>
       <p:nvGrpSpPr>
-        <p:cNvPr id="76" name="Shape 76"/>
+        <p:cNvPr id="48" name="Shape 48"/>
         <p:cNvGrpSpPr/>
         <p:nvPr/>
       </p:nvGrpSpPr>
@@ -3471,7 +3348,7 @@
       </p:grpSpPr>
       <p:sp>
         <p:nvSpPr>
-          <p:cNvPr id="77" name="Google Shape;77;p3:notes"/>
+          <p:cNvPr id="49" name="Google Shape;49;p2:notes"/>
           <p:cNvSpPr/>
           <p:nvPr>
             <p:ph idx="2" type="sldImg"/>
@@ -3516,7 +3393,7 @@
       </p:sp>
       <p:sp>
         <p:nvSpPr>
-          <p:cNvPr id="78" name="Google Shape;78;p3:notes"/>
+          <p:cNvPr id="50" name="Google Shape;50;p2:notes"/>
           <p:cNvSpPr txBox="1"/>
           <p:nvPr>
             <p:ph idx="1" type="body"/>
@@ -3525,7 +3402,7 @@
         <p:spPr>
           <a:xfrm>
             <a:off x="685800" y="4400550"/>
-            <a:ext cx="5486400" cy="3600600"/>
+            <a:ext cx="5486400" cy="3600450"/>
           </a:xfrm>
           <a:prstGeom prst="rect">
             <a:avLst/>
@@ -3556,7 +3433,7 @@
             </a:pPr>
             <a:r>
               <a:rPr lang="en-US"/>
-              <a:t>(~4 min for slides 4-5) Land the scale. A .NET/Oracle system feeding market and energy data; the ETL logic lives in VB.NET services, not in documents.</a:t>
+              <a:t>Four parts, one demo in the middle. Tell them what they can steal: the skill-file pattern, the index, the documentation standard.</a:t>
             </a:r>
             <a:endParaRPr/>
           </a:p>
@@ -3564,7 +3441,7 @@
       </p:sp>
       <p:sp>
         <p:nvSpPr>
-          <p:cNvPr id="79" name="Google Shape;79;p3:notes"/>
+          <p:cNvPr id="51" name="Google Shape;51;p2:notes"/>
           <p:cNvSpPr txBox="1"/>
           <p:nvPr>
             <p:ph idx="12" type="sldNum"/>
@@ -3573,7 +3450,7 @@
         <p:spPr>
           <a:xfrm>
             <a:off x="3884613" y="8685213"/>
-            <a:ext cx="2971800" cy="458700"/>
+            <a:ext cx="2971800" cy="458787"/>
           </a:xfrm>
           <a:prstGeom prst="rect">
             <a:avLst/>
@@ -3618,12 +3495,12 @@
 </p:notes>
 </file>
 
-<file path=ppt/notesSlides/notesSlide5.xml><?xml version="1.0" encoding="utf-8"?>
+<file path=ppt/notesSlides/notesSlide4.xml><?xml version="1.0" encoding="utf-8"?>
 <p:notes xmlns:a="http://schemas.openxmlformats.org/drawingml/2006/main" xmlns:r="http://schemas.openxmlformats.org/officeDocument/2006/relationships" xmlns:mc="http://schemas.openxmlformats.org/markup-compatibility/2006" xmlns:mv="urn:schemas-microsoft-com:mac:vml" xmlns:p="http://schemas.openxmlformats.org/presentationml/2006/main" xmlns:c="http://schemas.openxmlformats.org/drawingml/2006/chart" xmlns:dgm="http://schemas.openxmlformats.org/drawingml/2006/diagram" xmlns:o="urn:schemas-microsoft-com:office:office" xmlns:v="urn:schemas-microsoft-com:vml" xmlns:pvml="urn:schemas-microsoft-com:office:powerpoint" xmlns:com="http://schemas.openxmlformats.org/drawingml/2006/compatibility" xmlns:p14="http://schemas.microsoft.com/office/powerpoint/2010/main" xmlns:p15="http://schemas.microsoft.com/office/powerpoint/2012/main" xmlns:ahyp="http://schemas.microsoft.com/office/drawing/2018/hyperlinkcolor" showMasterPhAnim="0" showMasterSp="0">
   <p:cSld>
     <p:spTree>
       <p:nvGrpSpPr>
-        <p:cNvPr id="93" name="Shape 93"/>
+        <p:cNvPr id="76" name="Shape 76"/>
         <p:cNvGrpSpPr/>
         <p:nvPr/>
       </p:nvGrpSpPr>
@@ -3637,7 +3514,7 @@
       </p:grpSpPr>
       <p:sp>
         <p:nvSpPr>
-          <p:cNvPr id="94" name="Google Shape;94;p4:notes"/>
+          <p:cNvPr id="77" name="Google Shape;77;p3:notes"/>
           <p:cNvSpPr/>
           <p:nvPr>
             <p:ph idx="2" type="sldImg"/>
@@ -3682,7 +3559,7 @@
       </p:sp>
       <p:sp>
         <p:nvSpPr>
-          <p:cNvPr id="95" name="Google Shape;95;p4:notes"/>
+          <p:cNvPr id="78" name="Google Shape;78;p3:notes"/>
           <p:cNvSpPr txBox="1"/>
           <p:nvPr>
             <p:ph idx="1" type="body"/>
@@ -3691,7 +3568,7 @@
         <p:spPr>
           <a:xfrm>
             <a:off x="685800" y="4400550"/>
-            <a:ext cx="5486400" cy="3600450"/>
+            <a:ext cx="5486400" cy="3600600"/>
           </a:xfrm>
           <a:prstGeom prst="rect">
             <a:avLst/>
@@ -3722,7 +3599,7 @@
             </a:pPr>
             <a:r>
               <a:rPr lang="en-US"/>
-              <a:t>Business rules buried in procedural code, no specs, no tests. Manual review is months of reading, inconsistent notes, and knowledge that stays in people's heads. Keep this short - ad hoc AI is the more interesting failure story.</a:t>
+              <a:t>(~4 min for slides 4-5) Land the scale. A .NET/Oracle system feeding market and energy data; the ETL logic lives in VB.NET services, not in documents.</a:t>
             </a:r>
             <a:endParaRPr/>
           </a:p>
@@ -3730,7 +3607,7 @@
       </p:sp>
       <p:sp>
         <p:nvSpPr>
-          <p:cNvPr id="96" name="Google Shape;96;p4:notes"/>
+          <p:cNvPr id="79" name="Google Shape;79;p3:notes"/>
           <p:cNvSpPr txBox="1"/>
           <p:nvPr>
             <p:ph idx="12" type="sldNum"/>
@@ -3739,7 +3616,7 @@
         <p:spPr>
           <a:xfrm>
             <a:off x="3884613" y="8685213"/>
-            <a:ext cx="2971800" cy="458787"/>
+            <a:ext cx="2971800" cy="458700"/>
           </a:xfrm>
           <a:prstGeom prst="rect">
             <a:avLst/>
@@ -3784,12 +3661,12 @@
 </p:notes>
 </file>
 
-<file path=ppt/notesSlides/notesSlide6.xml><?xml version="1.0" encoding="utf-8"?>
+<file path=ppt/notesSlides/notesSlide5.xml><?xml version="1.0" encoding="utf-8"?>
 <p:notes xmlns:a="http://schemas.openxmlformats.org/drawingml/2006/main" xmlns:r="http://schemas.openxmlformats.org/officeDocument/2006/relationships" xmlns:mc="http://schemas.openxmlformats.org/markup-compatibility/2006" xmlns:mv="urn:schemas-microsoft-com:mac:vml" xmlns:p="http://schemas.openxmlformats.org/presentationml/2006/main" xmlns:c="http://schemas.openxmlformats.org/drawingml/2006/chart" xmlns:dgm="http://schemas.openxmlformats.org/drawingml/2006/diagram" xmlns:o="urn:schemas-microsoft-com:office:office" xmlns:v="urn:schemas-microsoft-com:vml" xmlns:pvml="urn:schemas-microsoft-com:office:powerpoint" xmlns:com="http://schemas.openxmlformats.org/drawingml/2006/compatibility" xmlns:p14="http://schemas.microsoft.com/office/powerpoint/2010/main" xmlns:p15="http://schemas.microsoft.com/office/powerpoint/2012/main" xmlns:ahyp="http://schemas.microsoft.com/office/drawing/2018/hyperlinkcolor" showMasterPhAnim="0" showMasterSp="0">
   <p:cSld>
     <p:spTree>
       <p:nvGrpSpPr>
-        <p:cNvPr id="115" name="Shape 115"/>
+        <p:cNvPr id="93" name="Shape 93"/>
         <p:cNvGrpSpPr/>
         <p:nvPr/>
       </p:nvGrpSpPr>
@@ -3803,7 +3680,7 @@
       </p:grpSpPr>
       <p:sp>
         <p:nvSpPr>
-          <p:cNvPr id="116" name="Google Shape;116;p5:notes"/>
+          <p:cNvPr id="94" name="Google Shape;94;p4:notes"/>
           <p:cNvSpPr/>
           <p:nvPr>
             <p:ph idx="2" type="sldImg"/>
@@ -3848,7 +3725,7 @@
       </p:sp>
       <p:sp>
         <p:nvSpPr>
-          <p:cNvPr id="117" name="Google Shape;117;p5:notes"/>
+          <p:cNvPr id="95" name="Google Shape;95;p4:notes"/>
           <p:cNvSpPr txBox="1"/>
           <p:nvPr>
             <p:ph idx="1" type="body"/>
@@ -3888,7 +3765,7 @@
             </a:pPr>
             <a:r>
               <a:rPr lang="en-US"/>
-              <a:t>(~4 min for slides 5-8.) Honest story: we started like everyone does. Each dev pointed Copilot at a service or proc with their own prompt. Felt fast; early results looked promising.</a:t>
+              <a:t>Business rules buried in procedural code, no specs, no tests. Manual review is months of reading, inconsistent notes, and knowledge that stays in people's heads. Keep this short - ad hoc AI is the more interesting failure story.</a:t>
             </a:r>
             <a:endParaRPr/>
           </a:p>
@@ -3896,7 +3773,7 @@
       </p:sp>
       <p:sp>
         <p:nvSpPr>
-          <p:cNvPr id="118" name="Google Shape;118;p5:notes"/>
+          <p:cNvPr id="96" name="Google Shape;96;p4:notes"/>
           <p:cNvSpPr txBox="1"/>
           <p:nvPr>
             <p:ph idx="12" type="sldNum"/>
@@ -3950,12 +3827,12 @@
 </p:notes>
 </file>
 
-<file path=ppt/notesSlides/notesSlide7.xml><?xml version="1.0" encoding="utf-8"?>
+<file path=ppt/notesSlides/notesSlide6.xml><?xml version="1.0" encoding="utf-8"?>
 <p:notes xmlns:a="http://schemas.openxmlformats.org/drawingml/2006/main" xmlns:r="http://schemas.openxmlformats.org/officeDocument/2006/relationships" xmlns:mc="http://schemas.openxmlformats.org/markup-compatibility/2006" xmlns:mv="urn:schemas-microsoft-com:mac:vml" xmlns:p="http://schemas.openxmlformats.org/presentationml/2006/main" xmlns:c="http://schemas.openxmlformats.org/drawingml/2006/chart" xmlns:dgm="http://schemas.openxmlformats.org/drawingml/2006/diagram" xmlns:o="urn:schemas-microsoft-com:office:office" xmlns:v="urn:schemas-microsoft-com:vml" xmlns:pvml="urn:schemas-microsoft-com:office:powerpoint" xmlns:com="http://schemas.openxmlformats.org/drawingml/2006/compatibility" xmlns:p14="http://schemas.microsoft.com/office/powerpoint/2010/main" xmlns:p15="http://schemas.microsoft.com/office/powerpoint/2012/main" xmlns:ahyp="http://schemas.microsoft.com/office/drawing/2018/hyperlinkcolor" showMasterPhAnim="0" showMasterSp="0">
   <p:cSld>
     <p:spTree>
       <p:nvGrpSpPr>
-        <p:cNvPr id="134" name="Shape 134"/>
+        <p:cNvPr id="115" name="Shape 115"/>
         <p:cNvGrpSpPr/>
         <p:nvPr/>
       </p:nvGrpSpPr>
@@ -3969,7 +3846,7 @@
       </p:grpSpPr>
       <p:sp>
         <p:nvSpPr>
-          <p:cNvPr id="135" name="Google Shape;135;p6:notes"/>
+          <p:cNvPr id="116" name="Google Shape;116;p5:notes"/>
           <p:cNvSpPr/>
           <p:nvPr>
             <p:ph idx="2" type="sldImg"/>
@@ -4014,7 +3891,7 @@
       </p:sp>
       <p:sp>
         <p:nvSpPr>
-          <p:cNvPr id="136" name="Google Shape;136;p6:notes"/>
+          <p:cNvPr id="117" name="Google Shape;117;p5:notes"/>
           <p:cNvSpPr txBox="1"/>
           <p:nvPr>
             <p:ph idx="1" type="body"/>
@@ -4039,22 +3916,26 @@
           </a:bodyPr>
           <a:lstStyle/>
           <a:p>
-            <a:pPr indent="0" lvl="0" marL="0" rtl="0" algn="l">
-              <a:lnSpc>
-                <a:spcPct val="100000"/>
-              </a:lnSpc>
-              <a:spcBef>
-                <a:spcPts val="0"/>
-              </a:spcBef>
-              <a:spcAft>
-                <a:spcPts val="0"/>
-              </a:spcAft>
+            <a:pPr indent="-228600" lvl="0" marL="457200" marR="0" rtl="0" algn="l">
+              <a:lnSpc>
+                <a:spcPct val="100000"/>
+              </a:lnSpc>
+              <a:spcBef>
+                <a:spcPts val="0"/>
+              </a:spcBef>
+              <a:spcAft>
+                <a:spcPts val="0"/>
+              </a:spcAft>
+              <a:buClr>
+                <a:srgbClr val="000000"/>
+              </a:buClr>
               <a:buSzPts val="1400"/>
+              <a:buFont typeface="Arial"/>
               <a:buNone/>
             </a:pPr>
             <a:r>
               <a:rPr lang="en-US"/>
-              <a:t>SWAP IN two real (sanitized) outputs for the same kind of procedure, side by side. These cards are illustrative. Light moment: everyone has seen vibe coding; this is vibe decoding. Highlight differences in structure, depth and terminology.</a:t>
+              <a:t>(~4 min for slides 6-8.) Honest story: we started like everyone does. Each dev pointed Copilot at a service or proc with their own prompt. Felt fast; early results looked promising.</a:t>
             </a:r>
             <a:endParaRPr/>
           </a:p>
@@ -4062,7 +3943,7 @@
       </p:sp>
       <p:sp>
         <p:nvSpPr>
-          <p:cNvPr id="137" name="Google Shape;137;p6:notes"/>
+          <p:cNvPr id="118" name="Google Shape;118;p5:notes"/>
           <p:cNvSpPr txBox="1"/>
           <p:nvPr>
             <p:ph idx="12" type="sldNum"/>
@@ -4116,12 +3997,12 @@
 </p:notes>
 </file>
 
-<file path=ppt/notesSlides/notesSlide8.xml><?xml version="1.0" encoding="utf-8"?>
+<file path=ppt/notesSlides/notesSlide7.xml><?xml version="1.0" encoding="utf-8"?>
 <p:notes xmlns:a="http://schemas.openxmlformats.org/drawingml/2006/main" xmlns:r="http://schemas.openxmlformats.org/officeDocument/2006/relationships" xmlns:mc="http://schemas.openxmlformats.org/markup-compatibility/2006" xmlns:mv="urn:schemas-microsoft-com:mac:vml" xmlns:p="http://schemas.openxmlformats.org/presentationml/2006/main" xmlns:c="http://schemas.openxmlformats.org/drawingml/2006/chart" xmlns:dgm="http://schemas.openxmlformats.org/drawingml/2006/diagram" xmlns:o="urn:schemas-microsoft-com:office:office" xmlns:v="urn:schemas-microsoft-com:vml" xmlns:pvml="urn:schemas-microsoft-com:office:powerpoint" xmlns:com="http://schemas.openxmlformats.org/drawingml/2006/compatibility" xmlns:p14="http://schemas.microsoft.com/office/powerpoint/2010/main" xmlns:p15="http://schemas.microsoft.com/office/powerpoint/2012/main" xmlns:ahyp="http://schemas.microsoft.com/office/drawing/2018/hyperlinkcolor" showMasterPhAnim="0" showMasterSp="0">
   <p:cSld>
     <p:spTree>
       <p:nvGrpSpPr>
-        <p:cNvPr id="148" name="Shape 148"/>
+        <p:cNvPr id="134" name="Shape 134"/>
         <p:cNvGrpSpPr/>
         <p:nvPr/>
       </p:nvGrpSpPr>
@@ -4135,7 +4016,7 @@
       </p:grpSpPr>
       <p:sp>
         <p:nvSpPr>
-          <p:cNvPr id="149" name="Google Shape;149;p7:notes"/>
+          <p:cNvPr id="135" name="Google Shape;135;p6:notes"/>
           <p:cNvSpPr/>
           <p:nvPr>
             <p:ph idx="2" type="sldImg"/>
@@ -4180,6 +4061,176 @@
       </p:sp>
       <p:sp>
         <p:nvSpPr>
+          <p:cNvPr id="136" name="Google Shape;136;p6:notes"/>
+          <p:cNvSpPr txBox="1"/>
+          <p:nvPr>
+            <p:ph idx="1" type="body"/>
+          </p:nvPr>
+        </p:nvSpPr>
+        <p:spPr>
+          <a:xfrm>
+            <a:off x="685800" y="4400550"/>
+            <a:ext cx="5486400" cy="3600450"/>
+          </a:xfrm>
+          <a:prstGeom prst="rect">
+            <a:avLst/>
+          </a:prstGeom>
+          <a:noFill/>
+          <a:ln>
+            <a:noFill/>
+          </a:ln>
+        </p:spPr>
+        <p:txBody>
+          <a:bodyPr anchorCtr="0" anchor="t" bIns="45700" lIns="91425" spcFirstLastPara="1" rIns="91425" wrap="square" tIns="45700">
+            <a:noAutofit/>
+          </a:bodyPr>
+          <a:lstStyle/>
+          <a:p>
+            <a:pPr indent="-228600" lvl="0" marL="457200" marR="0" rtl="0" algn="l">
+              <a:lnSpc>
+                <a:spcPct val="100000"/>
+              </a:lnSpc>
+              <a:spcBef>
+                <a:spcPts val="0"/>
+              </a:spcBef>
+              <a:spcAft>
+                <a:spcPts val="0"/>
+              </a:spcAft>
+              <a:buClr>
+                <a:srgbClr val="000000"/>
+              </a:buClr>
+              <a:buSzPts val="1400"/>
+              <a:buFont typeface="Arial"/>
+              <a:buNone/>
+            </a:pPr>
+            <a:r>
+              <a:rPr lang="en-US"/>
+              <a:t>Light moment: everyone has seen vibe coding; this is vibe decoding. Same kind of procedure, two different shapes of answer. Highlight differences in structure, depth and terminology.</a:t>
+            </a:r>
+            <a:endParaRPr/>
+          </a:p>
+        </p:txBody>
+      </p:sp>
+      <p:sp>
+        <p:nvSpPr>
+          <p:cNvPr id="137" name="Google Shape;137;p6:notes"/>
+          <p:cNvSpPr txBox="1"/>
+          <p:nvPr>
+            <p:ph idx="12" type="sldNum"/>
+          </p:nvPr>
+        </p:nvSpPr>
+        <p:spPr>
+          <a:xfrm>
+            <a:off x="3884613" y="8685213"/>
+            <a:ext cx="2971800" cy="458787"/>
+          </a:xfrm>
+          <a:prstGeom prst="rect">
+            <a:avLst/>
+          </a:prstGeom>
+          <a:noFill/>
+          <a:ln>
+            <a:noFill/>
+          </a:ln>
+        </p:spPr>
+        <p:txBody>
+          <a:bodyPr anchorCtr="0" anchor="b" bIns="45700" lIns="91425" spcFirstLastPara="1" rIns="91425" wrap="square" tIns="45700">
+            <a:noAutofit/>
+          </a:bodyPr>
+          <a:lstStyle/>
+          <a:p>
+            <a:pPr indent="0" lvl="0" marL="0" rtl="0" algn="r">
+              <a:lnSpc>
+                <a:spcPct val="100000"/>
+              </a:lnSpc>
+              <a:spcBef>
+                <a:spcPts val="0"/>
+              </a:spcBef>
+              <a:spcAft>
+                <a:spcPts val="0"/>
+              </a:spcAft>
+              <a:buSzPts val="1400"/>
+              <a:buNone/>
+            </a:pPr>
+            <a:fld id="{00000000-1234-1234-1234-123412341234}" type="slidenum">
+              <a:rPr lang="en-US"/>
+              <a:t>‹#›</a:t>
+            </a:fld>
+            <a:endParaRPr/>
+          </a:p>
+        </p:txBody>
+      </p:sp>
+    </p:spTree>
+  </p:cSld>
+  <p:clrMapOvr>
+    <a:masterClrMapping/>
+  </p:clrMapOvr>
+</p:notes>
+</file>
+
+<file path=ppt/notesSlides/notesSlide8.xml><?xml version="1.0" encoding="utf-8"?>
+<p:notes xmlns:a="http://schemas.openxmlformats.org/drawingml/2006/main" xmlns:r="http://schemas.openxmlformats.org/officeDocument/2006/relationships" xmlns:mc="http://schemas.openxmlformats.org/markup-compatibility/2006" xmlns:mv="urn:schemas-microsoft-com:mac:vml" xmlns:p="http://schemas.openxmlformats.org/presentationml/2006/main" xmlns:c="http://schemas.openxmlformats.org/drawingml/2006/chart" xmlns:dgm="http://schemas.openxmlformats.org/drawingml/2006/diagram" xmlns:o="urn:schemas-microsoft-com:office:office" xmlns:v="urn:schemas-microsoft-com:vml" xmlns:pvml="urn:schemas-microsoft-com:office:powerpoint" xmlns:com="http://schemas.openxmlformats.org/drawingml/2006/compatibility" xmlns:p14="http://schemas.microsoft.com/office/powerpoint/2010/main" xmlns:p15="http://schemas.microsoft.com/office/powerpoint/2012/main" xmlns:ahyp="http://schemas.microsoft.com/office/drawing/2018/hyperlinkcolor" showMasterPhAnim="0" showMasterSp="0">
+  <p:cSld>
+    <p:spTree>
+      <p:nvGrpSpPr>
+        <p:cNvPr id="148" name="Shape 148"/>
+        <p:cNvGrpSpPr/>
+        <p:nvPr/>
+      </p:nvGrpSpPr>
+      <p:grpSpPr>
+        <a:xfrm>
+          <a:off x="0" y="0"/>
+          <a:ext cx="0" cy="0"/>
+          <a:chOff x="0" y="0"/>
+          <a:chExt cx="0" cy="0"/>
+        </a:xfrm>
+      </p:grpSpPr>
+      <p:sp>
+        <p:nvSpPr>
+          <p:cNvPr id="149" name="Google Shape;149;p7:notes"/>
+          <p:cNvSpPr/>
+          <p:nvPr>
+            <p:ph idx="2" type="sldImg"/>
+          </p:nvPr>
+        </p:nvSpPr>
+        <p:spPr>
+          <a:xfrm>
+            <a:off x="685800" y="1143000"/>
+            <a:ext cx="5486400" cy="3086100"/>
+          </a:xfrm>
+          <a:custGeom>
+            <a:rect b="b" l="l" r="r" t="t"/>
+            <a:pathLst>
+              <a:path extrusionOk="0" h="120000" w="120000">
+                <a:moveTo>
+                  <a:pt x="0" y="0"/>
+                </a:moveTo>
+                <a:lnTo>
+                  <a:pt x="120000" y="0"/>
+                </a:lnTo>
+                <a:lnTo>
+                  <a:pt x="120000" y="120000"/>
+                </a:lnTo>
+                <a:lnTo>
+                  <a:pt x="0" y="120000"/>
+                </a:lnTo>
+                <a:close/>
+              </a:path>
+            </a:pathLst>
+          </a:custGeom>
+          <a:noFill/>
+          <a:ln cap="flat" cmpd="sng" w="12700">
+            <a:solidFill>
+              <a:srgbClr val="000000"/>
+            </a:solidFill>
+            <a:prstDash val="solid"/>
+            <a:round/>
+            <a:headEnd len="sm" w="sm" type="none"/>
+            <a:tailEnd len="sm" w="sm" type="none"/>
+          </a:ln>
+        </p:spPr>
+      </p:sp>
+      <p:sp>
+        <p:nvSpPr>
           <p:cNvPr id="150" name="Google Shape;150;p7:notes"/>
           <p:cNvSpPr txBox="1"/>
           <p:nvPr>
@@ -4205,22 +4256,26 @@
           </a:bodyPr>
           <a:lstStyle/>
           <a:p>
-            <a:pPr indent="0" lvl="0" marL="0" rtl="0" algn="l">
-              <a:lnSpc>
-                <a:spcPct val="100000"/>
-              </a:lnSpc>
-              <a:spcBef>
-                <a:spcPts val="0"/>
-              </a:spcBef>
-              <a:spcAft>
-                <a:spcPts val="0"/>
-              </a:spcAft>
+            <a:pPr indent="-228600" lvl="0" marL="457200" marR="0" rtl="0" algn="l">
+              <a:lnSpc>
+                <a:spcPct val="100000"/>
+              </a:lnSpc>
+              <a:spcBef>
+                <a:spcPts val="0"/>
+              </a:spcBef>
+              <a:spcAft>
+                <a:spcPts val="0"/>
+              </a:spcAft>
+              <a:buClr>
+                <a:srgbClr val="000000"/>
+              </a:buClr>
               <a:buSzPts val="1400"/>
+              <a:buFont typeface="Arial"/>
               <a:buNone/>
             </a:pPr>
             <a:r>
               <a:rPr lang="en-US"/>
-              <a:t>Add one rough number here if you have it: how long early attempts took, or how many different formats emerged.</a:t>
+              <a:t>Six problems, one root cause: no shared method. Walk the grid, and land on Costly: everyone re-reading all of the code burns tokens.</a:t>
             </a:r>
             <a:endParaRPr/>
           </a:p>
@@ -8021,7 +8076,7 @@
                 <a:cs typeface="Calibri"/>
                 <a:sym typeface="Calibri"/>
               </a:rPr>
-              <a:t>From 600k lines of code to 3k line index file</a:t>
+              <a:t>From 600k+ lines of code to 3k line index file</a:t>
             </a:r>
             <a:endParaRPr b="0" i="0" sz="1200" u="none" cap="none" strike="noStrike">
               <a:solidFill>
@@ -8889,7 +8944,7 @@
                 <a:cs typeface="Calibri"/>
                 <a:sym typeface="Calibri"/>
               </a:rPr>
-              <a:t>-</a:t>
+              <a:t> - </a:t>
             </a:r>
             <a:endParaRPr b="0" i="0" sz="1200" u="none" cap="none" strike="noStrike">
               <a:solidFill>
@@ -9207,7 +9262,7 @@
                 <a:cs typeface="Calibri"/>
                 <a:sym typeface="Calibri"/>
               </a:rPr>
-              <a:t>-</a:t>
+              <a:t> - </a:t>
             </a:r>
             <a:br>
               <a:rPr b="0" i="0" lang="en-US" sz="1200" u="none" cap="none" strike="noStrike">
@@ -11968,7 +12023,7 @@
       </p:grpSpPr>
       <p:sp>
         <p:nvSpPr>
-          <p:cNvPr id="294" name="Google Shape;294;p14"/>
+          <p:cNvPr id="294" name="Google Shape;294;p12"/>
           <p:cNvSpPr txBox="1"/>
           <p:nvPr>
             <p:ph type="title"/>
@@ -12011,28 +12066,12 @@
               <a:buNone/>
             </a:pPr>
             <a:r>
-              <a:rPr lang="en-US"/>
-              <a:t>What </a:t>
-            </a:r>
-            <a:r>
               <a:rPr b="1" lang="en-US" sz="3000">
                 <a:solidFill>
                   <a:schemeClr val="dk2"/>
                 </a:solidFill>
               </a:rPr>
-              <a:t>we'd </a:t>
-            </a:r>
-            <a:r>
-              <a:rPr lang="en-US"/>
-              <a:t>improve for </a:t>
-            </a:r>
-            <a:r>
-              <a:rPr b="1" lang="en-US" sz="3000">
-                <a:solidFill>
-                  <a:schemeClr val="dk2"/>
-                </a:solidFill>
-              </a:rPr>
-              <a:t>next time</a:t>
+              <a:t>From documentation to blueprint</a:t>
             </a:r>
             <a:endParaRPr sz="3000"/>
           </a:p>
@@ -12040,7 +12079,7 @@
       </p:sp>
       <p:sp>
         <p:nvSpPr>
-          <p:cNvPr id="295" name="Google Shape;295;p14"/>
+          <p:cNvPr id="295" name="Google Shape;295;p12"/>
           <p:cNvSpPr/>
           <p:nvPr/>
         </p:nvSpPr>
@@ -12101,14 +12140,73 @@
       </p:sp>
       <p:sp>
         <p:nvSpPr>
-          <p:cNvPr id="296" name="Google Shape;296;p14"/>
+          <p:cNvPr id="296" name="Google Shape;296;p12"/>
+          <p:cNvSpPr/>
+          <p:nvPr/>
+        </p:nvSpPr>
+        <p:spPr>
+          <a:xfrm>
+            <a:off x="685800" y="1691640"/>
+            <a:ext cx="457200" cy="457200"/>
+          </a:xfrm>
+          <a:prstGeom prst="ellipse">
+            <a:avLst/>
+          </a:prstGeom>
+          <a:solidFill>
+            <a:schemeClr val="accent3"/>
+          </a:solidFill>
+          <a:ln>
+            <a:noFill/>
+          </a:ln>
+        </p:spPr>
+        <p:txBody>
+          <a:bodyPr anchorCtr="0" anchor="ctr" bIns="91425" lIns="91425" spcFirstLastPara="1" rIns="91425" wrap="square" tIns="91425">
+            <a:noAutofit/>
+          </a:bodyPr>
+          <a:lstStyle/>
+          <a:p>
+            <a:pPr indent="0" lvl="0" marL="0" marR="0" rtl="0" algn="l">
+              <a:lnSpc>
+                <a:spcPct val="100000"/>
+              </a:lnSpc>
+              <a:spcBef>
+                <a:spcPts val="0"/>
+              </a:spcBef>
+              <a:spcAft>
+                <a:spcPts val="0"/>
+              </a:spcAft>
+              <a:buClr>
+                <a:srgbClr val="000000"/>
+              </a:buClr>
+              <a:buSzPts val="1400"/>
+              <a:buFont typeface="Arial"/>
+              <a:buNone/>
+            </a:pPr>
+            <a:r>
+              <a:t/>
+            </a:r>
+            <a:endParaRPr b="0" i="0" sz="1400" u="none" cap="none" strike="noStrike">
+              <a:solidFill>
+                <a:srgbClr val="000000"/>
+              </a:solidFill>
+              <a:latin typeface="Arial"/>
+              <a:ea typeface="Arial"/>
+              <a:cs typeface="Arial"/>
+              <a:sym typeface="Arial"/>
+            </a:endParaRPr>
+          </a:p>
+        </p:txBody>
+      </p:sp>
+      <p:sp>
+        <p:nvSpPr>
+          <p:cNvPr id="297" name="Google Shape;297;p12"/>
           <p:cNvSpPr txBox="1"/>
           <p:nvPr/>
         </p:nvSpPr>
         <p:spPr>
           <a:xfrm>
             <a:off x="685800" y="1691640"/>
-            <a:ext cx="2103120" cy="822960"/>
+            <a:ext cx="457200" cy="457200"/>
           </a:xfrm>
           <a:prstGeom prst="rect">
             <a:avLst/>
@@ -12119,41 +12217,41 @@
           </a:ln>
         </p:spPr>
         <p:txBody>
-          <a:bodyPr anchorCtr="0" anchor="t" bIns="0" lIns="0" spcFirstLastPara="1" rIns="0" wrap="square" tIns="0">
-            <a:noAutofit/>
-          </a:bodyPr>
-          <a:lstStyle/>
-          <a:p>
-            <a:pPr indent="0" lvl="0" marL="0" marR="0" rtl="0" algn="l">
-              <a:lnSpc>
-                <a:spcPct val="100000"/>
-              </a:lnSpc>
-              <a:spcBef>
-                <a:spcPts val="0"/>
-              </a:spcBef>
-              <a:spcAft>
-                <a:spcPts val="0"/>
-              </a:spcAft>
-              <a:buClr>
-                <a:schemeClr val="accent5"/>
-              </a:buClr>
-              <a:buSzPts val="2000"/>
+          <a:bodyPr anchorCtr="0" anchor="ctr" bIns="0" lIns="0" spcFirstLastPara="1" rIns="0" wrap="square" tIns="0">
+            <a:noAutofit/>
+          </a:bodyPr>
+          <a:lstStyle/>
+          <a:p>
+            <a:pPr indent="0" lvl="0" marL="0" marR="0" rtl="0" algn="ctr">
+              <a:lnSpc>
+                <a:spcPct val="100000"/>
+              </a:lnSpc>
+              <a:spcBef>
+                <a:spcPts val="0"/>
+              </a:spcBef>
+              <a:spcAft>
+                <a:spcPts val="0"/>
+              </a:spcAft>
+              <a:buClr>
+                <a:schemeClr val="lt1"/>
+              </a:buClr>
+              <a:buSzPts val="1600"/>
               <a:buFont typeface="Calibri"/>
               <a:buNone/>
             </a:pPr>
             <a:r>
-              <a:rPr b="1" i="0" lang="en-US" sz="2000" u="none" cap="none" strike="noStrike">
-                <a:solidFill>
-                  <a:schemeClr val="accent5"/>
+              <a:rPr b="1" i="0" lang="en-US" sz="1600" u="none" cap="none" strike="noStrike">
+                <a:solidFill>
+                  <a:schemeClr val="lt1"/>
                 </a:solidFill>
                 <a:latin typeface="Calibri"/>
                 <a:ea typeface="Calibri"/>
                 <a:cs typeface="Calibri"/>
                 <a:sym typeface="Calibri"/>
               </a:rPr>
-              <a:t>Sharper skills</a:t>
-            </a:r>
-            <a:endParaRPr b="0" i="0" sz="2000" u="none" cap="none" strike="noStrike">
+              <a:t>1</a:t>
+            </a:r>
+            <a:endParaRPr b="0" i="0" sz="1600" u="none" cap="none" strike="noStrike">
               <a:solidFill>
                 <a:schemeClr val="dk1"/>
               </a:solidFill>
@@ -12167,14 +12265,14 @@
       </p:sp>
       <p:sp>
         <p:nvSpPr>
-          <p:cNvPr id="297" name="Google Shape;297;p14"/>
+          <p:cNvPr id="298" name="Google Shape;298;p12"/>
           <p:cNvSpPr txBox="1"/>
           <p:nvPr/>
         </p:nvSpPr>
         <p:spPr>
           <a:xfrm>
-            <a:off x="685800" y="2651760"/>
-            <a:ext cx="2103120" cy="1097280"/>
+            <a:off x="685800" y="2331720"/>
+            <a:ext cx="2103120" cy="640080"/>
           </a:xfrm>
           <a:prstGeom prst="rect">
             <a:avLst/>
@@ -12201,25 +12299,25 @@
                 <a:spcPts val="0"/>
               </a:spcAft>
               <a:buClr>
-                <a:schemeClr val="dk1"/>
-              </a:buClr>
-              <a:buSzPts val="1400"/>
+                <a:schemeClr val="dk2"/>
+              </a:buClr>
+              <a:buSzPts val="1800"/>
               <a:buFont typeface="Calibri"/>
               <a:buNone/>
             </a:pPr>
             <a:r>
-              <a:rPr b="0" i="0" lang="en-US" sz="1400" u="none" cap="none" strike="noStrike">
-                <a:solidFill>
-                  <a:schemeClr val="dk1"/>
+              <a:rPr b="1" i="0" lang="en-US" sz="1800" u="none" cap="none" strike="noStrike">
+                <a:solidFill>
+                  <a:schemeClr val="dk2"/>
                 </a:solidFill>
                 <a:latin typeface="Calibri"/>
                 <a:ea typeface="Calibri"/>
                 <a:cs typeface="Calibri"/>
                 <a:sym typeface="Calibri"/>
               </a:rPr>
-              <a:t>Focused skills per service type, so prompts get shorter and output stays consistent</a:t>
-            </a:r>
-            <a:endParaRPr b="0" i="0" sz="1400" u="none" cap="none" strike="noStrike">
+              <a:t>Docs become the spec</a:t>
+            </a:r>
+            <a:endParaRPr b="0" i="0" sz="1800" u="none" cap="none" strike="noStrike">
               <a:solidFill>
                 <a:schemeClr val="dk1"/>
               </a:solidFill>
@@ -12233,7 +12331,135 @@
       </p:sp>
       <p:sp>
         <p:nvSpPr>
-          <p:cNvPr id="298" name="Google Shape;298;p14"/>
+          <p:cNvPr id="299" name="Google Shape;299;p12"/>
+          <p:cNvSpPr txBox="1"/>
+          <p:nvPr/>
+        </p:nvSpPr>
+        <p:spPr>
+          <a:xfrm>
+            <a:off x="685800" y="3017520"/>
+            <a:ext cx="2103120" cy="731520"/>
+          </a:xfrm>
+          <a:prstGeom prst="rect">
+            <a:avLst/>
+          </a:prstGeom>
+          <a:noFill/>
+          <a:ln>
+            <a:noFill/>
+          </a:ln>
+        </p:spPr>
+        <p:txBody>
+          <a:bodyPr anchorCtr="0" anchor="t" bIns="0" lIns="0" spcFirstLastPara="1" rIns="0" wrap="square" tIns="0">
+            <a:noAutofit/>
+          </a:bodyPr>
+          <a:lstStyle/>
+          <a:p>
+            <a:pPr indent="0" lvl="0" marL="0" marR="0" rtl="0" algn="l">
+              <a:lnSpc>
+                <a:spcPct val="100000"/>
+              </a:lnSpc>
+              <a:spcBef>
+                <a:spcPts val="0"/>
+              </a:spcBef>
+              <a:spcAft>
+                <a:spcPts val="0"/>
+              </a:spcAft>
+              <a:buClr>
+                <a:schemeClr val="dk1"/>
+              </a:buClr>
+              <a:buSzPts val="1400"/>
+              <a:buFont typeface="Calibri"/>
+              <a:buNone/>
+            </a:pPr>
+            <a:r>
+              <a:rPr b="0" i="0" lang="en-US" sz="1400" u="none" cap="none" strike="noStrike">
+                <a:solidFill>
+                  <a:schemeClr val="dk1"/>
+                </a:solidFill>
+                <a:latin typeface="Calibri"/>
+                <a:ea typeface="Calibri"/>
+                <a:cs typeface="Calibri"/>
+                <a:sym typeface="Calibri"/>
+              </a:rPr>
+              <a:t>The standard document is the input for the Databricks build</a:t>
+            </a:r>
+            <a:endParaRPr b="0" i="0" sz="1400" u="none" cap="none" strike="noStrike">
+              <a:solidFill>
+                <a:schemeClr val="dk1"/>
+              </a:solidFill>
+              <a:latin typeface="Calibri"/>
+              <a:ea typeface="Calibri"/>
+              <a:cs typeface="Calibri"/>
+              <a:sym typeface="Calibri"/>
+            </a:endParaRPr>
+          </a:p>
+        </p:txBody>
+      </p:sp>
+      <p:sp>
+        <p:nvSpPr>
+          <p:cNvPr id="300" name="Google Shape;300;p12"/>
+          <p:cNvSpPr/>
+          <p:nvPr/>
+        </p:nvSpPr>
+        <p:spPr>
+          <a:xfrm>
+            <a:off x="3035808" y="2468880"/>
+            <a:ext cx="237744" cy="274320"/>
+          </a:xfrm>
+          <a:prstGeom prst="rightArrow">
+            <a:avLst>
+              <a:gd fmla="val 50000" name="adj1"/>
+              <a:gd fmla="val 50000" name="adj2"/>
+            </a:avLst>
+          </a:prstGeom>
+          <a:solidFill>
+            <a:schemeClr val="accent2"/>
+          </a:solidFill>
+          <a:ln>
+            <a:noFill/>
+          </a:ln>
+        </p:spPr>
+        <p:txBody>
+          <a:bodyPr anchorCtr="0" anchor="ctr" bIns="91425" lIns="91425" spcFirstLastPara="1" rIns="91425" wrap="square" tIns="91425">
+            <a:noAutofit/>
+          </a:bodyPr>
+          <a:lstStyle/>
+          <a:p>
+            <a:pPr indent="0" lvl="0" marL="0" marR="0" rtl="0" algn="l">
+              <a:lnSpc>
+                <a:spcPct val="100000"/>
+              </a:lnSpc>
+              <a:spcBef>
+                <a:spcPts val="0"/>
+              </a:spcBef>
+              <a:spcAft>
+                <a:spcPts val="0"/>
+              </a:spcAft>
+              <a:buClr>
+                <a:srgbClr val="000000"/>
+              </a:buClr>
+              <a:buSzPts val="1400"/>
+              <a:buFont typeface="Arial"/>
+              <a:buNone/>
+            </a:pPr>
+            <a:r>
+              <a:t/>
+            </a:r>
+            <a:endParaRPr b="0" i="0" sz="1400" u="none" cap="none" strike="noStrike">
+              <a:solidFill>
+                <a:srgbClr val="000000"/>
+              </a:solidFill>
+              <a:latin typeface="Arial"/>
+              <a:ea typeface="Arial"/>
+              <a:cs typeface="Arial"/>
+              <a:sym typeface="Arial"/>
+            </a:endParaRPr>
+          </a:p>
+        </p:txBody>
+      </p:sp>
+      <p:sp>
+        <p:nvSpPr>
+          <p:cNvPr id="301" name="Google Shape;301;p12"/>
           <p:cNvSpPr/>
           <p:nvPr/>
         </p:nvSpPr>
@@ -12294,14 +12520,73 @@
       </p:sp>
       <p:sp>
         <p:nvSpPr>
-          <p:cNvPr id="299" name="Google Shape;299;p14"/>
+          <p:cNvPr id="302" name="Google Shape;302;p12"/>
+          <p:cNvSpPr/>
+          <p:nvPr/>
+        </p:nvSpPr>
+        <p:spPr>
+          <a:xfrm>
+            <a:off x="3520440" y="1691640"/>
+            <a:ext cx="457200" cy="457200"/>
+          </a:xfrm>
+          <a:prstGeom prst="ellipse">
+            <a:avLst/>
+          </a:prstGeom>
+          <a:solidFill>
+            <a:schemeClr val="accent3"/>
+          </a:solidFill>
+          <a:ln>
+            <a:noFill/>
+          </a:ln>
+        </p:spPr>
+        <p:txBody>
+          <a:bodyPr anchorCtr="0" anchor="ctr" bIns="91425" lIns="91425" spcFirstLastPara="1" rIns="91425" wrap="square" tIns="91425">
+            <a:noAutofit/>
+          </a:bodyPr>
+          <a:lstStyle/>
+          <a:p>
+            <a:pPr indent="0" lvl="0" marL="0" marR="0" rtl="0" algn="l">
+              <a:lnSpc>
+                <a:spcPct val="100000"/>
+              </a:lnSpc>
+              <a:spcBef>
+                <a:spcPts val="0"/>
+              </a:spcBef>
+              <a:spcAft>
+                <a:spcPts val="0"/>
+              </a:spcAft>
+              <a:buClr>
+                <a:srgbClr val="000000"/>
+              </a:buClr>
+              <a:buSzPts val="1400"/>
+              <a:buFont typeface="Arial"/>
+              <a:buNone/>
+            </a:pPr>
+            <a:r>
+              <a:t/>
+            </a:r>
+            <a:endParaRPr b="0" i="0" sz="1400" u="none" cap="none" strike="noStrike">
+              <a:solidFill>
+                <a:srgbClr val="000000"/>
+              </a:solidFill>
+              <a:latin typeface="Arial"/>
+              <a:ea typeface="Arial"/>
+              <a:cs typeface="Arial"/>
+              <a:sym typeface="Arial"/>
+            </a:endParaRPr>
+          </a:p>
+        </p:txBody>
+      </p:sp>
+      <p:sp>
+        <p:nvSpPr>
+          <p:cNvPr id="303" name="Google Shape;303;p12"/>
           <p:cNvSpPr txBox="1"/>
           <p:nvPr/>
         </p:nvSpPr>
         <p:spPr>
           <a:xfrm>
             <a:off x="3520440" y="1691640"/>
-            <a:ext cx="2103120" cy="822960"/>
+            <a:ext cx="457200" cy="457200"/>
           </a:xfrm>
           <a:prstGeom prst="rect">
             <a:avLst/>
@@ -12312,41 +12597,41 @@
           </a:ln>
         </p:spPr>
         <p:txBody>
-          <a:bodyPr anchorCtr="0" anchor="t" bIns="0" lIns="0" spcFirstLastPara="1" rIns="0" wrap="square" tIns="0">
-            <a:noAutofit/>
-          </a:bodyPr>
-          <a:lstStyle/>
-          <a:p>
-            <a:pPr indent="0" lvl="0" marL="0" marR="0" rtl="0" algn="l">
-              <a:lnSpc>
-                <a:spcPct val="100000"/>
-              </a:lnSpc>
-              <a:spcBef>
-                <a:spcPts val="0"/>
-              </a:spcBef>
-              <a:spcAft>
-                <a:spcPts val="0"/>
-              </a:spcAft>
-              <a:buClr>
-                <a:schemeClr val="accent5"/>
-              </a:buClr>
-              <a:buSzPts val="2000"/>
+          <a:bodyPr anchorCtr="0" anchor="ctr" bIns="0" lIns="0" spcFirstLastPara="1" rIns="0" wrap="square" tIns="0">
+            <a:noAutofit/>
+          </a:bodyPr>
+          <a:lstStyle/>
+          <a:p>
+            <a:pPr indent="0" lvl="0" marL="0" marR="0" rtl="0" algn="ctr">
+              <a:lnSpc>
+                <a:spcPct val="100000"/>
+              </a:lnSpc>
+              <a:spcBef>
+                <a:spcPts val="0"/>
+              </a:spcBef>
+              <a:spcAft>
+                <a:spcPts val="0"/>
+              </a:spcAft>
+              <a:buClr>
+                <a:schemeClr val="lt1"/>
+              </a:buClr>
+              <a:buSzPts val="1600"/>
               <a:buFont typeface="Calibri"/>
               <a:buNone/>
             </a:pPr>
             <a:r>
-              <a:rPr b="1" i="0" lang="en-US" sz="2000" u="none" cap="none" strike="noStrike">
-                <a:solidFill>
-                  <a:schemeClr val="accent5"/>
+              <a:rPr b="1" i="0" lang="en-US" sz="1600" u="none" cap="none" strike="noStrike">
+                <a:solidFill>
+                  <a:schemeClr val="lt1"/>
                 </a:solidFill>
                 <a:latin typeface="Calibri"/>
                 <a:ea typeface="Calibri"/>
                 <a:cs typeface="Calibri"/>
                 <a:sym typeface="Calibri"/>
               </a:rPr>
-              <a:t>An agent, not prompts</a:t>
-            </a:r>
-            <a:endParaRPr b="0" i="0" sz="2000" u="none" cap="none" strike="noStrike">
+              <a:t>2</a:t>
+            </a:r>
+            <a:endParaRPr b="0" i="0" sz="1600" u="none" cap="none" strike="noStrike">
               <a:solidFill>
                 <a:schemeClr val="dk1"/>
               </a:solidFill>
@@ -12360,14 +12645,14 @@
       </p:sp>
       <p:sp>
         <p:nvSpPr>
-          <p:cNvPr id="300" name="Google Shape;300;p14"/>
+          <p:cNvPr id="304" name="Google Shape;304;p12"/>
           <p:cNvSpPr txBox="1"/>
           <p:nvPr/>
         </p:nvSpPr>
         <p:spPr>
           <a:xfrm>
-            <a:off x="3520440" y="2651760"/>
-            <a:ext cx="2103120" cy="1097280"/>
+            <a:off x="3520440" y="2331720"/>
+            <a:ext cx="2103120" cy="640080"/>
           </a:xfrm>
           <a:prstGeom prst="rect">
             <a:avLst/>
@@ -12394,25 +12679,25 @@
                 <a:spcPts val="0"/>
               </a:spcAft>
               <a:buClr>
-                <a:schemeClr val="dk1"/>
-              </a:buClr>
-              <a:buSzPts val="1400"/>
+                <a:schemeClr val="dk2"/>
+              </a:buClr>
+              <a:buSzPts val="1800"/>
               <a:buFont typeface="Calibri"/>
               <a:buNone/>
             </a:pPr>
             <a:r>
-              <a:rPr b="0" i="0" lang="en-US" sz="1400" u="none" cap="none" strike="noStrike">
-                <a:solidFill>
-                  <a:schemeClr val="dk1"/>
+              <a:rPr b="1" i="0" lang="en-US" sz="1800" u="none" cap="none" strike="noStrike">
+                <a:solidFill>
+                  <a:schemeClr val="dk2"/>
                 </a:solidFill>
                 <a:latin typeface="Calibri"/>
                 <a:ea typeface="Calibri"/>
                 <a:cs typeface="Calibri"/>
                 <a:sym typeface="Calibri"/>
               </a:rPr>
-              <a:t>An agent runs the skills across the index, so nobody hand-prompts each service</a:t>
-            </a:r>
-            <a:endParaRPr b="0" i="0" sz="1400" u="none" cap="none" strike="noStrike">
+              <a:t>Copilot builds from it</a:t>
+            </a:r>
+            <a:endParaRPr b="0" i="0" sz="1800" u="none" cap="none" strike="noStrike">
               <a:solidFill>
                 <a:schemeClr val="dk1"/>
               </a:solidFill>
@@ -12426,7 +12711,135 @@
       </p:sp>
       <p:sp>
         <p:nvSpPr>
-          <p:cNvPr id="301" name="Google Shape;301;p14"/>
+          <p:cNvPr id="305" name="Google Shape;305;p12"/>
+          <p:cNvSpPr txBox="1"/>
+          <p:nvPr/>
+        </p:nvSpPr>
+        <p:spPr>
+          <a:xfrm>
+            <a:off x="3520440" y="3017520"/>
+            <a:ext cx="2103120" cy="731520"/>
+          </a:xfrm>
+          <a:prstGeom prst="rect">
+            <a:avLst/>
+          </a:prstGeom>
+          <a:noFill/>
+          <a:ln>
+            <a:noFill/>
+          </a:ln>
+        </p:spPr>
+        <p:txBody>
+          <a:bodyPr anchorCtr="0" anchor="t" bIns="0" lIns="0" spcFirstLastPara="1" rIns="0" wrap="square" tIns="0">
+            <a:noAutofit/>
+          </a:bodyPr>
+          <a:lstStyle/>
+          <a:p>
+            <a:pPr indent="0" lvl="0" marL="0" marR="0" rtl="0" algn="l">
+              <a:lnSpc>
+                <a:spcPct val="100000"/>
+              </a:lnSpc>
+              <a:spcBef>
+                <a:spcPts val="0"/>
+              </a:spcBef>
+              <a:spcAft>
+                <a:spcPts val="0"/>
+              </a:spcAft>
+              <a:buClr>
+                <a:schemeClr val="dk1"/>
+              </a:buClr>
+              <a:buSzPts val="1400"/>
+              <a:buFont typeface="Calibri"/>
+              <a:buNone/>
+            </a:pPr>
+            <a:r>
+              <a:rPr b="0" i="0" lang="en-US" sz="1400" u="none" cap="none" strike="noStrike">
+                <a:solidFill>
+                  <a:schemeClr val="dk1"/>
+                </a:solidFill>
+                <a:latin typeface="Calibri"/>
+                <a:ea typeface="Calibri"/>
+                <a:cs typeface="Calibri"/>
+                <a:sym typeface="Calibri"/>
+              </a:rPr>
+              <a:t>The blueprint guides generation of the new code</a:t>
+            </a:r>
+            <a:endParaRPr b="0" i="0" sz="1400" u="none" cap="none" strike="noStrike">
+              <a:solidFill>
+                <a:schemeClr val="dk1"/>
+              </a:solidFill>
+              <a:latin typeface="Calibri"/>
+              <a:ea typeface="Calibri"/>
+              <a:cs typeface="Calibri"/>
+              <a:sym typeface="Calibri"/>
+            </a:endParaRPr>
+          </a:p>
+        </p:txBody>
+      </p:sp>
+      <p:sp>
+        <p:nvSpPr>
+          <p:cNvPr id="306" name="Google Shape;306;p12"/>
+          <p:cNvSpPr/>
+          <p:nvPr/>
+        </p:nvSpPr>
+        <p:spPr>
+          <a:xfrm>
+            <a:off x="5870448" y="2468880"/>
+            <a:ext cx="237744" cy="274320"/>
+          </a:xfrm>
+          <a:prstGeom prst="rightArrow">
+            <a:avLst>
+              <a:gd fmla="val 50000" name="adj1"/>
+              <a:gd fmla="val 50000" name="adj2"/>
+            </a:avLst>
+          </a:prstGeom>
+          <a:solidFill>
+            <a:schemeClr val="accent2"/>
+          </a:solidFill>
+          <a:ln>
+            <a:noFill/>
+          </a:ln>
+        </p:spPr>
+        <p:txBody>
+          <a:bodyPr anchorCtr="0" anchor="ctr" bIns="91425" lIns="91425" spcFirstLastPara="1" rIns="91425" wrap="square" tIns="91425">
+            <a:noAutofit/>
+          </a:bodyPr>
+          <a:lstStyle/>
+          <a:p>
+            <a:pPr indent="0" lvl="0" marL="0" marR="0" rtl="0" algn="l">
+              <a:lnSpc>
+                <a:spcPct val="100000"/>
+              </a:lnSpc>
+              <a:spcBef>
+                <a:spcPts val="0"/>
+              </a:spcBef>
+              <a:spcAft>
+                <a:spcPts val="0"/>
+              </a:spcAft>
+              <a:buClr>
+                <a:srgbClr val="000000"/>
+              </a:buClr>
+              <a:buSzPts val="1400"/>
+              <a:buFont typeface="Arial"/>
+              <a:buNone/>
+            </a:pPr>
+            <a:r>
+              <a:t/>
+            </a:r>
+            <a:endParaRPr b="0" i="0" sz="1400" u="none" cap="none" strike="noStrike">
+              <a:solidFill>
+                <a:srgbClr val="000000"/>
+              </a:solidFill>
+              <a:latin typeface="Arial"/>
+              <a:ea typeface="Arial"/>
+              <a:cs typeface="Arial"/>
+              <a:sym typeface="Arial"/>
+            </a:endParaRPr>
+          </a:p>
+        </p:txBody>
+      </p:sp>
+      <p:sp>
+        <p:nvSpPr>
+          <p:cNvPr id="307" name="Google Shape;307;p12"/>
           <p:cNvSpPr/>
           <p:nvPr/>
         </p:nvSpPr>
@@ -12487,14 +12900,73 @@
       </p:sp>
       <p:sp>
         <p:nvSpPr>
-          <p:cNvPr id="302" name="Google Shape;302;p14"/>
+          <p:cNvPr id="308" name="Google Shape;308;p12"/>
+          <p:cNvSpPr/>
+          <p:nvPr/>
+        </p:nvSpPr>
+        <p:spPr>
+          <a:xfrm>
+            <a:off x="6355080" y="1691640"/>
+            <a:ext cx="457200" cy="457200"/>
+          </a:xfrm>
+          <a:prstGeom prst="ellipse">
+            <a:avLst/>
+          </a:prstGeom>
+          <a:solidFill>
+            <a:schemeClr val="accent3"/>
+          </a:solidFill>
+          <a:ln>
+            <a:noFill/>
+          </a:ln>
+        </p:spPr>
+        <p:txBody>
+          <a:bodyPr anchorCtr="0" anchor="ctr" bIns="91425" lIns="91425" spcFirstLastPara="1" rIns="91425" wrap="square" tIns="91425">
+            <a:noAutofit/>
+          </a:bodyPr>
+          <a:lstStyle/>
+          <a:p>
+            <a:pPr indent="0" lvl="0" marL="0" marR="0" rtl="0" algn="l">
+              <a:lnSpc>
+                <a:spcPct val="100000"/>
+              </a:lnSpc>
+              <a:spcBef>
+                <a:spcPts val="0"/>
+              </a:spcBef>
+              <a:spcAft>
+                <a:spcPts val="0"/>
+              </a:spcAft>
+              <a:buClr>
+                <a:srgbClr val="000000"/>
+              </a:buClr>
+              <a:buSzPts val="1400"/>
+              <a:buFont typeface="Arial"/>
+              <a:buNone/>
+            </a:pPr>
+            <a:r>
+              <a:t/>
+            </a:r>
+            <a:endParaRPr b="0" i="0" sz="1400" u="none" cap="none" strike="noStrike">
+              <a:solidFill>
+                <a:srgbClr val="000000"/>
+              </a:solidFill>
+              <a:latin typeface="Arial"/>
+              <a:ea typeface="Arial"/>
+              <a:cs typeface="Arial"/>
+              <a:sym typeface="Arial"/>
+            </a:endParaRPr>
+          </a:p>
+        </p:txBody>
+      </p:sp>
+      <p:sp>
+        <p:nvSpPr>
+          <p:cNvPr id="309" name="Google Shape;309;p12"/>
           <p:cNvSpPr txBox="1"/>
           <p:nvPr/>
         </p:nvSpPr>
         <p:spPr>
           <a:xfrm>
             <a:off x="6355080" y="1691640"/>
-            <a:ext cx="2103120" cy="822960"/>
+            <a:ext cx="457200" cy="457200"/>
           </a:xfrm>
           <a:prstGeom prst="rect">
             <a:avLst/>
@@ -12505,41 +12977,41 @@
           </a:ln>
         </p:spPr>
         <p:txBody>
-          <a:bodyPr anchorCtr="0" anchor="t" bIns="0" lIns="0" spcFirstLastPara="1" rIns="0" wrap="square" tIns="0">
-            <a:noAutofit/>
-          </a:bodyPr>
-          <a:lstStyle/>
-          <a:p>
-            <a:pPr indent="0" lvl="0" marL="0" marR="0" rtl="0" algn="l">
-              <a:lnSpc>
-                <a:spcPct val="100000"/>
-              </a:lnSpc>
-              <a:spcBef>
-                <a:spcPts val="0"/>
-              </a:spcBef>
-              <a:spcAft>
-                <a:spcPts val="0"/>
-              </a:spcAft>
-              <a:buClr>
-                <a:schemeClr val="accent5"/>
-              </a:buClr>
-              <a:buSzPts val="2000"/>
+          <a:bodyPr anchorCtr="0" anchor="ctr" bIns="0" lIns="0" spcFirstLastPara="1" rIns="0" wrap="square" tIns="0">
+            <a:noAutofit/>
+          </a:bodyPr>
+          <a:lstStyle/>
+          <a:p>
+            <a:pPr indent="0" lvl="0" marL="0" marR="0" rtl="0" algn="ctr">
+              <a:lnSpc>
+                <a:spcPct val="100000"/>
+              </a:lnSpc>
+              <a:spcBef>
+                <a:spcPts val="0"/>
+              </a:spcBef>
+              <a:spcAft>
+                <a:spcPts val="0"/>
+              </a:spcAft>
+              <a:buClr>
+                <a:schemeClr val="lt1"/>
+              </a:buClr>
+              <a:buSzPts val="1600"/>
               <a:buFont typeface="Calibri"/>
               <a:buNone/>
             </a:pPr>
             <a:r>
-              <a:rPr b="1" i="0" lang="en-US" sz="2000" u="none" cap="none" strike="noStrike">
-                <a:solidFill>
-                  <a:schemeClr val="accent5"/>
+              <a:rPr b="1" i="0" lang="en-US" sz="1600" u="none" cap="none" strike="noStrike">
+                <a:solidFill>
+                  <a:schemeClr val="lt1"/>
                 </a:solidFill>
                 <a:latin typeface="Calibri"/>
                 <a:ea typeface="Calibri"/>
                 <a:cs typeface="Calibri"/>
                 <a:sym typeface="Calibri"/>
               </a:rPr>
-              <a:t>Evidence and checks built in</a:t>
-            </a:r>
-            <a:endParaRPr b="0" i="0" sz="2000" u="none" cap="none" strike="noStrike">
+              <a:t>3</a:t>
+            </a:r>
+            <a:endParaRPr b="0" i="0" sz="1600" u="none" cap="none" strike="noStrike">
               <a:solidFill>
                 <a:schemeClr val="dk1"/>
               </a:solidFill>
@@ -12553,14 +13025,14 @@
       </p:sp>
       <p:sp>
         <p:nvSpPr>
-          <p:cNvPr id="303" name="Google Shape;303;p14"/>
+          <p:cNvPr id="310" name="Google Shape;310;p12"/>
           <p:cNvSpPr txBox="1"/>
           <p:nvPr/>
         </p:nvSpPr>
         <p:spPr>
           <a:xfrm>
-            <a:off x="6355080" y="2651760"/>
-            <a:ext cx="2103120" cy="1097280"/>
+            <a:off x="6355080" y="2331720"/>
+            <a:ext cx="2103120" cy="640080"/>
           </a:xfrm>
           <a:prstGeom prst="rect">
             <a:avLst/>
@@ -12587,25 +13059,25 @@
                 <a:spcPts val="0"/>
               </a:spcAft>
               <a:buClr>
-                <a:schemeClr val="dk1"/>
-              </a:buClr>
-              <a:buSzPts val="1400"/>
+                <a:schemeClr val="dk2"/>
+              </a:buClr>
+              <a:buSzPts val="1800"/>
               <a:buFont typeface="Calibri"/>
               <a:buNone/>
             </a:pPr>
             <a:r>
-              <a:rPr b="0" i="0" lang="en-US" sz="1400" u="none" cap="none" strike="noStrike">
-                <a:solidFill>
-                  <a:schemeClr val="dk1"/>
+              <a:rPr b="1" i="0" lang="en-US" sz="1800" u="none" cap="none" strike="noStrike">
+                <a:solidFill>
+                  <a:schemeClr val="dk2"/>
                 </a:solidFill>
                 <a:latin typeface="Calibri"/>
                 <a:ea typeface="Calibri"/>
                 <a:cs typeface="Calibri"/>
                 <a:sym typeface="Calibri"/>
               </a:rPr>
-              <a:t>A cited claim for every statement, a reviewer agent and automated validation</a:t>
-            </a:r>
-            <a:endParaRPr b="0" i="0" sz="1400" u="none" cap="none" strike="noStrike">
+              <a:t>Metadata drives ingestion</a:t>
+            </a:r>
+            <a:endParaRPr b="0" i="0" sz="1800" u="none" cap="none" strike="noStrike">
               <a:solidFill>
                 <a:schemeClr val="dk1"/>
               </a:solidFill>
@@ -12619,7 +13091,73 @@
       </p:sp>
       <p:sp>
         <p:nvSpPr>
-          <p:cNvPr id="304" name="Google Shape;304;p14"/>
+          <p:cNvPr id="311" name="Google Shape;311;p12"/>
+          <p:cNvSpPr txBox="1"/>
+          <p:nvPr/>
+        </p:nvSpPr>
+        <p:spPr>
+          <a:xfrm>
+            <a:off x="6355080" y="3017520"/>
+            <a:ext cx="2103120" cy="731520"/>
+          </a:xfrm>
+          <a:prstGeom prst="rect">
+            <a:avLst/>
+          </a:prstGeom>
+          <a:noFill/>
+          <a:ln>
+            <a:noFill/>
+          </a:ln>
+        </p:spPr>
+        <p:txBody>
+          <a:bodyPr anchorCtr="0" anchor="t" bIns="0" lIns="0" spcFirstLastPara="1" rIns="0" wrap="square" tIns="0">
+            <a:noAutofit/>
+          </a:bodyPr>
+          <a:lstStyle/>
+          <a:p>
+            <a:pPr indent="0" lvl="0" marL="0" marR="0" rtl="0" algn="l">
+              <a:lnSpc>
+                <a:spcPct val="100000"/>
+              </a:lnSpc>
+              <a:spcBef>
+                <a:spcPts val="0"/>
+              </a:spcBef>
+              <a:spcAft>
+                <a:spcPts val="0"/>
+              </a:spcAft>
+              <a:buClr>
+                <a:schemeClr val="dk1"/>
+              </a:buClr>
+              <a:buSzPts val="1400"/>
+              <a:buFont typeface="Calibri"/>
+              <a:buNone/>
+            </a:pPr>
+            <a:r>
+              <a:rPr b="0" i="0" lang="en-US" sz="1400" u="none" cap="none" strike="noStrike">
+                <a:solidFill>
+                  <a:schemeClr val="dk1"/>
+                </a:solidFill>
+                <a:latin typeface="Calibri"/>
+                <a:ea typeface="Calibri"/>
+                <a:cs typeface="Calibri"/>
+                <a:sym typeface="Calibri"/>
+              </a:rPr>
+              <a:t>Findings feed metadata-driven ingestion directly</a:t>
+            </a:r>
+            <a:endParaRPr b="0" i="0" sz="1400" u="none" cap="none" strike="noStrike">
+              <a:solidFill>
+                <a:schemeClr val="dk1"/>
+              </a:solidFill>
+              <a:latin typeface="Calibri"/>
+              <a:ea typeface="Calibri"/>
+              <a:cs typeface="Calibri"/>
+              <a:sym typeface="Calibri"/>
+            </a:endParaRPr>
+          </a:p>
+        </p:txBody>
+      </p:sp>
+      <p:sp>
+        <p:nvSpPr>
+          <p:cNvPr id="312" name="Google Shape;312;p12"/>
           <p:cNvSpPr txBox="1"/>
           <p:nvPr>
             <p:ph idx="4294967295" type="sldNum"/>
@@ -12694,7 +13232,7 @@
   <p:cSld>
     <p:spTree>
       <p:nvGrpSpPr>
-        <p:cNvPr id="309" name="Shape 309"/>
+        <p:cNvPr id="317" name="Shape 317"/>
         <p:cNvGrpSpPr/>
         <p:nvPr/>
       </p:nvGrpSpPr>
@@ -12708,7 +13246,7 @@
       </p:grpSpPr>
       <p:sp>
         <p:nvSpPr>
-          <p:cNvPr id="310" name="Google Shape;310;p12"/>
+          <p:cNvPr id="318" name="Google Shape;318;p14"/>
           <p:cNvSpPr txBox="1"/>
           <p:nvPr>
             <p:ph type="title"/>
@@ -12751,12 +13289,28 @@
               <a:buNone/>
             </a:pPr>
             <a:r>
+              <a:rPr lang="en-US"/>
+              <a:t>What </a:t>
+            </a:r>
+            <a:r>
               <a:rPr b="1" lang="en-US" sz="3000">
                 <a:solidFill>
                   <a:schemeClr val="dk2"/>
                 </a:solidFill>
               </a:rPr>
-              <a:t>From documentation to blueprint</a:t>
+              <a:t>we'd </a:t>
+            </a:r>
+            <a:r>
+              <a:rPr lang="en-US"/>
+              <a:t>improve for </a:t>
+            </a:r>
+            <a:r>
+              <a:rPr b="1" lang="en-US" sz="3000">
+                <a:solidFill>
+                  <a:schemeClr val="dk2"/>
+                </a:solidFill>
+              </a:rPr>
+              <a:t>next time</a:t>
             </a:r>
             <a:endParaRPr sz="3000"/>
           </a:p>
@@ -12764,7 +13318,7 @@
       </p:sp>
       <p:sp>
         <p:nvSpPr>
-          <p:cNvPr id="311" name="Google Shape;311;p12"/>
+          <p:cNvPr id="319" name="Google Shape;319;p14"/>
           <p:cNvSpPr/>
           <p:nvPr/>
         </p:nvSpPr>
@@ -12825,20 +13379,154 @@
       </p:sp>
       <p:sp>
         <p:nvSpPr>
-          <p:cNvPr id="312" name="Google Shape;312;p12"/>
+          <p:cNvPr id="320" name="Google Shape;320;p14"/>
+          <p:cNvSpPr txBox="1"/>
+          <p:nvPr/>
+        </p:nvSpPr>
+        <p:spPr>
+          <a:xfrm>
+            <a:off x="685800" y="1691640"/>
+            <a:ext cx="2103120" cy="822960"/>
+          </a:xfrm>
+          <a:prstGeom prst="rect">
+            <a:avLst/>
+          </a:prstGeom>
+          <a:noFill/>
+          <a:ln>
+            <a:noFill/>
+          </a:ln>
+        </p:spPr>
+        <p:txBody>
+          <a:bodyPr anchorCtr="0" anchor="t" bIns="0" lIns="0" spcFirstLastPara="1" rIns="0" wrap="square" tIns="0">
+            <a:noAutofit/>
+          </a:bodyPr>
+          <a:lstStyle/>
+          <a:p>
+            <a:pPr indent="0" lvl="0" marL="0" marR="0" rtl="0" algn="l">
+              <a:lnSpc>
+                <a:spcPct val="100000"/>
+              </a:lnSpc>
+              <a:spcBef>
+                <a:spcPts val="0"/>
+              </a:spcBef>
+              <a:spcAft>
+                <a:spcPts val="0"/>
+              </a:spcAft>
+              <a:buClr>
+                <a:schemeClr val="accent5"/>
+              </a:buClr>
+              <a:buSzPts val="2000"/>
+              <a:buFont typeface="Calibri"/>
+              <a:buNone/>
+            </a:pPr>
+            <a:r>
+              <a:rPr b="1" i="0" lang="en-US" sz="2000" u="none" cap="none" strike="noStrike">
+                <a:solidFill>
+                  <a:schemeClr val="accent5"/>
+                </a:solidFill>
+                <a:latin typeface="Calibri"/>
+                <a:ea typeface="Calibri"/>
+                <a:cs typeface="Calibri"/>
+                <a:sym typeface="Calibri"/>
+              </a:rPr>
+              <a:t>Sharper skills</a:t>
+            </a:r>
+            <a:endParaRPr b="0" i="0" sz="2000" u="none" cap="none" strike="noStrike">
+              <a:solidFill>
+                <a:schemeClr val="dk1"/>
+              </a:solidFill>
+              <a:latin typeface="Calibri"/>
+              <a:ea typeface="Calibri"/>
+              <a:cs typeface="Calibri"/>
+              <a:sym typeface="Calibri"/>
+            </a:endParaRPr>
+          </a:p>
+        </p:txBody>
+      </p:sp>
+      <p:sp>
+        <p:nvSpPr>
+          <p:cNvPr id="321" name="Google Shape;321;p14"/>
+          <p:cNvSpPr txBox="1"/>
+          <p:nvPr/>
+        </p:nvSpPr>
+        <p:spPr>
+          <a:xfrm>
+            <a:off x="685800" y="2651760"/>
+            <a:ext cx="2103120" cy="1097280"/>
+          </a:xfrm>
+          <a:prstGeom prst="rect">
+            <a:avLst/>
+          </a:prstGeom>
+          <a:noFill/>
+          <a:ln>
+            <a:noFill/>
+          </a:ln>
+        </p:spPr>
+        <p:txBody>
+          <a:bodyPr anchorCtr="0" anchor="t" bIns="0" lIns="0" spcFirstLastPara="1" rIns="0" wrap="square" tIns="0">
+            <a:noAutofit/>
+          </a:bodyPr>
+          <a:lstStyle/>
+          <a:p>
+            <a:pPr indent="0" lvl="0" marL="0" marR="0" rtl="0" algn="l">
+              <a:lnSpc>
+                <a:spcPct val="100000"/>
+              </a:lnSpc>
+              <a:spcBef>
+                <a:spcPts val="0"/>
+              </a:spcBef>
+              <a:spcAft>
+                <a:spcPts val="0"/>
+              </a:spcAft>
+              <a:buClr>
+                <a:schemeClr val="dk1"/>
+              </a:buClr>
+              <a:buSzPts val="1400"/>
+              <a:buFont typeface="Calibri"/>
+              <a:buNone/>
+            </a:pPr>
+            <a:r>
+              <a:rPr b="0" i="0" lang="en-US" sz="1400" u="none" cap="none" strike="noStrike">
+                <a:solidFill>
+                  <a:schemeClr val="dk1"/>
+                </a:solidFill>
+                <a:latin typeface="Calibri"/>
+                <a:ea typeface="Calibri"/>
+                <a:cs typeface="Calibri"/>
+                <a:sym typeface="Calibri"/>
+              </a:rPr>
+              <a:t>Focused skills per service type, so prompts get shorter and output stays consistent</a:t>
+            </a:r>
+            <a:endParaRPr b="0" i="0" sz="1400" u="none" cap="none" strike="noStrike">
+              <a:solidFill>
+                <a:schemeClr val="dk1"/>
+              </a:solidFill>
+              <a:latin typeface="Calibri"/>
+              <a:ea typeface="Calibri"/>
+              <a:cs typeface="Calibri"/>
+              <a:sym typeface="Calibri"/>
+            </a:endParaRPr>
+          </a:p>
+        </p:txBody>
+      </p:sp>
+      <p:sp>
+        <p:nvSpPr>
+          <p:cNvPr id="322" name="Google Shape;322;p14"/>
           <p:cNvSpPr/>
           <p:nvPr/>
         </p:nvSpPr>
         <p:spPr>
           <a:xfrm>
-            <a:off x="685800" y="1691640"/>
-            <a:ext cx="457200" cy="457200"/>
-          </a:xfrm>
-          <a:prstGeom prst="ellipse">
-            <a:avLst/>
+            <a:off x="3291840" y="1463040"/>
+            <a:ext cx="2560320" cy="2377440"/>
+          </a:xfrm>
+          <a:prstGeom prst="roundRect">
+            <a:avLst>
+              <a:gd fmla="val 3077" name="adj"/>
+            </a:avLst>
           </a:prstGeom>
           <a:solidFill>
-            <a:schemeClr val="accent3"/>
+            <a:schemeClr val="lt2"/>
           </a:solidFill>
           <a:ln>
             <a:noFill/>
@@ -12884,14 +13572,14 @@
       </p:sp>
       <p:sp>
         <p:nvSpPr>
-          <p:cNvPr id="313" name="Google Shape;313;p12"/>
+          <p:cNvPr id="323" name="Google Shape;323;p14"/>
           <p:cNvSpPr txBox="1"/>
           <p:nvPr/>
         </p:nvSpPr>
         <p:spPr>
           <a:xfrm>
-            <a:off x="685800" y="1691640"/>
-            <a:ext cx="457200" cy="457200"/>
+            <a:off x="3520440" y="1691640"/>
+            <a:ext cx="2103120" cy="822960"/>
           </a:xfrm>
           <a:prstGeom prst="rect">
             <a:avLst/>
@@ -12902,41 +13590,41 @@
           </a:ln>
         </p:spPr>
         <p:txBody>
-          <a:bodyPr anchorCtr="0" anchor="ctr" bIns="0" lIns="0" spcFirstLastPara="1" rIns="0" wrap="square" tIns="0">
-            <a:noAutofit/>
-          </a:bodyPr>
-          <a:lstStyle/>
-          <a:p>
-            <a:pPr indent="0" lvl="0" marL="0" marR="0" rtl="0" algn="ctr">
-              <a:lnSpc>
-                <a:spcPct val="100000"/>
-              </a:lnSpc>
-              <a:spcBef>
-                <a:spcPts val="0"/>
-              </a:spcBef>
-              <a:spcAft>
-                <a:spcPts val="0"/>
-              </a:spcAft>
-              <a:buClr>
-                <a:schemeClr val="lt1"/>
-              </a:buClr>
-              <a:buSzPts val="1600"/>
+          <a:bodyPr anchorCtr="0" anchor="t" bIns="0" lIns="0" spcFirstLastPara="1" rIns="0" wrap="square" tIns="0">
+            <a:noAutofit/>
+          </a:bodyPr>
+          <a:lstStyle/>
+          <a:p>
+            <a:pPr indent="0" lvl="0" marL="0" marR="0" rtl="0" algn="l">
+              <a:lnSpc>
+                <a:spcPct val="100000"/>
+              </a:lnSpc>
+              <a:spcBef>
+                <a:spcPts val="0"/>
+              </a:spcBef>
+              <a:spcAft>
+                <a:spcPts val="0"/>
+              </a:spcAft>
+              <a:buClr>
+                <a:schemeClr val="accent5"/>
+              </a:buClr>
+              <a:buSzPts val="2000"/>
               <a:buFont typeface="Calibri"/>
               <a:buNone/>
             </a:pPr>
             <a:r>
-              <a:rPr b="1" i="0" lang="en-US" sz="1600" u="none" cap="none" strike="noStrike">
-                <a:solidFill>
-                  <a:schemeClr val="lt1"/>
+              <a:rPr b="1" i="0" lang="en-US" sz="2000" u="none" cap="none" strike="noStrike">
+                <a:solidFill>
+                  <a:schemeClr val="accent5"/>
                 </a:solidFill>
                 <a:latin typeface="Calibri"/>
                 <a:ea typeface="Calibri"/>
                 <a:cs typeface="Calibri"/>
                 <a:sym typeface="Calibri"/>
               </a:rPr>
-              <a:t>1</a:t>
-            </a:r>
-            <a:endParaRPr b="0" i="0" sz="1600" u="none" cap="none" strike="noStrike">
+              <a:t>An agent, not prompts</a:t>
+            </a:r>
+            <a:endParaRPr b="0" i="0" sz="2000" u="none" cap="none" strike="noStrike">
               <a:solidFill>
                 <a:schemeClr val="dk1"/>
               </a:solidFill>
@@ -12950,14 +13638,14 @@
       </p:sp>
       <p:sp>
         <p:nvSpPr>
-          <p:cNvPr id="314" name="Google Shape;314;p12"/>
+          <p:cNvPr id="324" name="Google Shape;324;p14"/>
           <p:cNvSpPr txBox="1"/>
           <p:nvPr/>
         </p:nvSpPr>
         <p:spPr>
           <a:xfrm>
-            <a:off x="685800" y="2331720"/>
-            <a:ext cx="2103120" cy="640080"/>
+            <a:off x="3520440" y="2651760"/>
+            <a:ext cx="2103120" cy="1097280"/>
           </a:xfrm>
           <a:prstGeom prst="rect">
             <a:avLst/>
@@ -12984,49 +13672,25 @@
                 <a:spcPts val="0"/>
               </a:spcAft>
               <a:buClr>
-                <a:schemeClr val="dk2"/>
-              </a:buClr>
-              <a:buSzPts val="1800"/>
+                <a:schemeClr val="dk1"/>
+              </a:buClr>
+              <a:buSzPts val="1400"/>
               <a:buFont typeface="Calibri"/>
               <a:buNone/>
             </a:pPr>
             <a:r>
-              <a:rPr b="1" i="0" lang="en-US" sz="1800" u="none" cap="none" strike="noStrike">
-                <a:solidFill>
-                  <a:schemeClr val="dk2"/>
+              <a:rPr b="0" i="0" lang="en-US" sz="1400" u="none" cap="none" strike="noStrike">
+                <a:solidFill>
+                  <a:schemeClr val="dk1"/>
                 </a:solidFill>
                 <a:latin typeface="Calibri"/>
                 <a:ea typeface="Calibri"/>
                 <a:cs typeface="Calibri"/>
                 <a:sym typeface="Calibri"/>
               </a:rPr>
-              <a:t>Docs bec</a:t>
-            </a:r>
-            <a:r>
-              <a:rPr b="1" lang="en-US" sz="1800">
-                <a:solidFill>
-                  <a:schemeClr val="dk2"/>
-                </a:solidFill>
-                <a:latin typeface="Calibri"/>
-                <a:ea typeface="Calibri"/>
-                <a:cs typeface="Calibri"/>
-                <a:sym typeface="Calibri"/>
-              </a:rPr>
-              <a:t>o</a:t>
-            </a:r>
-            <a:r>
-              <a:rPr b="1" i="0" lang="en-US" sz="1800" u="none" cap="none" strike="noStrike">
-                <a:solidFill>
-                  <a:schemeClr val="dk2"/>
-                </a:solidFill>
-                <a:latin typeface="Calibri"/>
-                <a:ea typeface="Calibri"/>
-                <a:cs typeface="Calibri"/>
-                <a:sym typeface="Calibri"/>
-              </a:rPr>
-              <a:t>me the spec</a:t>
-            </a:r>
-            <a:endParaRPr b="0" i="0" sz="1800" u="none" cap="none" strike="noStrike">
+              <a:t>An agent runs the skills across the index, so nobody hand-prompts each service</a:t>
+            </a:r>
+            <a:endParaRPr b="0" i="0" sz="1400" u="none" cap="none" strike="noStrike">
               <a:solidFill>
                 <a:schemeClr val="dk1"/>
               </a:solidFill>
@@ -13040,14 +13704,75 @@
       </p:sp>
       <p:sp>
         <p:nvSpPr>
-          <p:cNvPr id="315" name="Google Shape;315;p12"/>
+          <p:cNvPr id="325" name="Google Shape;325;p14"/>
+          <p:cNvSpPr/>
+          <p:nvPr/>
+        </p:nvSpPr>
+        <p:spPr>
+          <a:xfrm>
+            <a:off x="6126480" y="1463040"/>
+            <a:ext cx="2560320" cy="2377440"/>
+          </a:xfrm>
+          <a:prstGeom prst="roundRect">
+            <a:avLst>
+              <a:gd fmla="val 3077" name="adj"/>
+            </a:avLst>
+          </a:prstGeom>
+          <a:solidFill>
+            <a:schemeClr val="lt2"/>
+          </a:solidFill>
+          <a:ln>
+            <a:noFill/>
+          </a:ln>
+        </p:spPr>
+        <p:txBody>
+          <a:bodyPr anchorCtr="0" anchor="ctr" bIns="91425" lIns="91425" spcFirstLastPara="1" rIns="91425" wrap="square" tIns="91425">
+            <a:noAutofit/>
+          </a:bodyPr>
+          <a:lstStyle/>
+          <a:p>
+            <a:pPr indent="0" lvl="0" marL="0" marR="0" rtl="0" algn="l">
+              <a:lnSpc>
+                <a:spcPct val="100000"/>
+              </a:lnSpc>
+              <a:spcBef>
+                <a:spcPts val="0"/>
+              </a:spcBef>
+              <a:spcAft>
+                <a:spcPts val="0"/>
+              </a:spcAft>
+              <a:buClr>
+                <a:srgbClr val="000000"/>
+              </a:buClr>
+              <a:buSzPts val="1400"/>
+              <a:buFont typeface="Arial"/>
+              <a:buNone/>
+            </a:pPr>
+            <a:r>
+              <a:t/>
+            </a:r>
+            <a:endParaRPr b="0" i="0" sz="1400" u="none" cap="none" strike="noStrike">
+              <a:solidFill>
+                <a:srgbClr val="000000"/>
+              </a:solidFill>
+              <a:latin typeface="Arial"/>
+              <a:ea typeface="Arial"/>
+              <a:cs typeface="Arial"/>
+              <a:sym typeface="Arial"/>
+            </a:endParaRPr>
+          </a:p>
+        </p:txBody>
+      </p:sp>
+      <p:sp>
+        <p:nvSpPr>
+          <p:cNvPr id="326" name="Google Shape;326;p14"/>
           <p:cNvSpPr txBox="1"/>
           <p:nvPr/>
         </p:nvSpPr>
         <p:spPr>
           <a:xfrm>
-            <a:off x="685800" y="3017520"/>
-            <a:ext cx="2103120" cy="731520"/>
+            <a:off x="6355080" y="1691640"/>
+            <a:ext cx="2103120" cy="822960"/>
           </a:xfrm>
           <a:prstGeom prst="rect">
             <a:avLst/>
@@ -13074,25 +13799,25 @@
                 <a:spcPts val="0"/>
               </a:spcAft>
               <a:buClr>
-                <a:schemeClr val="dk1"/>
-              </a:buClr>
-              <a:buSzPts val="1400"/>
+                <a:schemeClr val="accent5"/>
+              </a:buClr>
+              <a:buSzPts val="2000"/>
               <a:buFont typeface="Calibri"/>
               <a:buNone/>
             </a:pPr>
             <a:r>
-              <a:rPr b="0" i="0" lang="en-US" sz="1400" u="none" cap="none" strike="noStrike">
-                <a:solidFill>
-                  <a:schemeClr val="dk1"/>
+              <a:rPr b="1" i="0" lang="en-US" sz="2000" u="none" cap="none" strike="noStrike">
+                <a:solidFill>
+                  <a:schemeClr val="accent5"/>
                 </a:solidFill>
                 <a:latin typeface="Calibri"/>
                 <a:ea typeface="Calibri"/>
                 <a:cs typeface="Calibri"/>
                 <a:sym typeface="Calibri"/>
               </a:rPr>
-              <a:t>The standard document is the input for the Databricks build</a:t>
-            </a:r>
-            <a:endParaRPr b="0" i="0" sz="1400" u="none" cap="none" strike="noStrike">
+              <a:t>Evidence and checks built in</a:t>
+            </a:r>
+            <a:endParaRPr b="0" i="0" sz="2000" u="none" cap="none" strike="noStrike">
               <a:solidFill>
                 <a:schemeClr val="dk1"/>
               </a:solidFill>
@@ -13106,196 +13831,14 @@
       </p:sp>
       <p:sp>
         <p:nvSpPr>
-          <p:cNvPr id="316" name="Google Shape;316;p12"/>
-          <p:cNvSpPr/>
-          <p:nvPr/>
-        </p:nvSpPr>
-        <p:spPr>
-          <a:xfrm>
-            <a:off x="3035808" y="2468880"/>
-            <a:ext cx="237744" cy="274320"/>
-          </a:xfrm>
-          <a:prstGeom prst="rightArrow">
-            <a:avLst>
-              <a:gd fmla="val 50000" name="adj1"/>
-              <a:gd fmla="val 50000" name="adj2"/>
-            </a:avLst>
-          </a:prstGeom>
-          <a:solidFill>
-            <a:schemeClr val="accent2"/>
-          </a:solidFill>
-          <a:ln>
-            <a:noFill/>
-          </a:ln>
-        </p:spPr>
-        <p:txBody>
-          <a:bodyPr anchorCtr="0" anchor="ctr" bIns="91425" lIns="91425" spcFirstLastPara="1" rIns="91425" wrap="square" tIns="91425">
-            <a:noAutofit/>
-          </a:bodyPr>
-          <a:lstStyle/>
-          <a:p>
-            <a:pPr indent="0" lvl="0" marL="0" marR="0" rtl="0" algn="l">
-              <a:lnSpc>
-                <a:spcPct val="100000"/>
-              </a:lnSpc>
-              <a:spcBef>
-                <a:spcPts val="0"/>
-              </a:spcBef>
-              <a:spcAft>
-                <a:spcPts val="0"/>
-              </a:spcAft>
-              <a:buClr>
-                <a:srgbClr val="000000"/>
-              </a:buClr>
-              <a:buSzPts val="1400"/>
-              <a:buFont typeface="Arial"/>
-              <a:buNone/>
-            </a:pPr>
-            <a:r>
-              <a:t/>
-            </a:r>
-            <a:endParaRPr b="0" i="0" sz="1400" u="none" cap="none" strike="noStrike">
-              <a:solidFill>
-                <a:srgbClr val="000000"/>
-              </a:solidFill>
-              <a:latin typeface="Arial"/>
-              <a:ea typeface="Arial"/>
-              <a:cs typeface="Arial"/>
-              <a:sym typeface="Arial"/>
-            </a:endParaRPr>
-          </a:p>
-        </p:txBody>
-      </p:sp>
-      <p:sp>
-        <p:nvSpPr>
-          <p:cNvPr id="317" name="Google Shape;317;p12"/>
-          <p:cNvSpPr/>
-          <p:nvPr/>
-        </p:nvSpPr>
-        <p:spPr>
-          <a:xfrm>
-            <a:off x="3291840" y="1463040"/>
-            <a:ext cx="2560320" cy="2377440"/>
-          </a:xfrm>
-          <a:prstGeom prst="roundRect">
-            <a:avLst>
-              <a:gd fmla="val 3077" name="adj"/>
-            </a:avLst>
-          </a:prstGeom>
-          <a:solidFill>
-            <a:schemeClr val="lt2"/>
-          </a:solidFill>
-          <a:ln>
-            <a:noFill/>
-          </a:ln>
-        </p:spPr>
-        <p:txBody>
-          <a:bodyPr anchorCtr="0" anchor="ctr" bIns="91425" lIns="91425" spcFirstLastPara="1" rIns="91425" wrap="square" tIns="91425">
-            <a:noAutofit/>
-          </a:bodyPr>
-          <a:lstStyle/>
-          <a:p>
-            <a:pPr indent="0" lvl="0" marL="0" marR="0" rtl="0" algn="l">
-              <a:lnSpc>
-                <a:spcPct val="100000"/>
-              </a:lnSpc>
-              <a:spcBef>
-                <a:spcPts val="0"/>
-              </a:spcBef>
-              <a:spcAft>
-                <a:spcPts val="0"/>
-              </a:spcAft>
-              <a:buClr>
-                <a:srgbClr val="000000"/>
-              </a:buClr>
-              <a:buSzPts val="1400"/>
-              <a:buFont typeface="Arial"/>
-              <a:buNone/>
-            </a:pPr>
-            <a:r>
-              <a:t/>
-            </a:r>
-            <a:endParaRPr b="0" i="0" sz="1400" u="none" cap="none" strike="noStrike">
-              <a:solidFill>
-                <a:srgbClr val="000000"/>
-              </a:solidFill>
-              <a:latin typeface="Arial"/>
-              <a:ea typeface="Arial"/>
-              <a:cs typeface="Arial"/>
-              <a:sym typeface="Arial"/>
-            </a:endParaRPr>
-          </a:p>
-        </p:txBody>
-      </p:sp>
-      <p:sp>
-        <p:nvSpPr>
-          <p:cNvPr id="318" name="Google Shape;318;p12"/>
-          <p:cNvSpPr/>
-          <p:nvPr/>
-        </p:nvSpPr>
-        <p:spPr>
-          <a:xfrm>
-            <a:off x="3520440" y="1691640"/>
-            <a:ext cx="457200" cy="457200"/>
-          </a:xfrm>
-          <a:prstGeom prst="ellipse">
-            <a:avLst/>
-          </a:prstGeom>
-          <a:solidFill>
-            <a:schemeClr val="accent3"/>
-          </a:solidFill>
-          <a:ln>
-            <a:noFill/>
-          </a:ln>
-        </p:spPr>
-        <p:txBody>
-          <a:bodyPr anchorCtr="0" anchor="ctr" bIns="91425" lIns="91425" spcFirstLastPara="1" rIns="91425" wrap="square" tIns="91425">
-            <a:noAutofit/>
-          </a:bodyPr>
-          <a:lstStyle/>
-          <a:p>
-            <a:pPr indent="0" lvl="0" marL="0" marR="0" rtl="0" algn="l">
-              <a:lnSpc>
-                <a:spcPct val="100000"/>
-              </a:lnSpc>
-              <a:spcBef>
-                <a:spcPts val="0"/>
-              </a:spcBef>
-              <a:spcAft>
-                <a:spcPts val="0"/>
-              </a:spcAft>
-              <a:buClr>
-                <a:srgbClr val="000000"/>
-              </a:buClr>
-              <a:buSzPts val="1400"/>
-              <a:buFont typeface="Arial"/>
-              <a:buNone/>
-            </a:pPr>
-            <a:r>
-              <a:t/>
-            </a:r>
-            <a:endParaRPr b="0" i="0" sz="1400" u="none" cap="none" strike="noStrike">
-              <a:solidFill>
-                <a:srgbClr val="000000"/>
-              </a:solidFill>
-              <a:latin typeface="Arial"/>
-              <a:ea typeface="Arial"/>
-              <a:cs typeface="Arial"/>
-              <a:sym typeface="Arial"/>
-            </a:endParaRPr>
-          </a:p>
-        </p:txBody>
-      </p:sp>
-      <p:sp>
-        <p:nvSpPr>
-          <p:cNvPr id="319" name="Google Shape;319;p12"/>
+          <p:cNvPr id="327" name="Google Shape;327;p14"/>
           <p:cNvSpPr txBox="1"/>
           <p:nvPr/>
         </p:nvSpPr>
         <p:spPr>
           <a:xfrm>
-            <a:off x="3520440" y="1691640"/>
-            <a:ext cx="457200" cy="457200"/>
+            <a:off x="6355080" y="2651760"/>
+            <a:ext cx="2103120" cy="1097280"/>
           </a:xfrm>
           <a:prstGeom prst="rect">
             <a:avLst/>
@@ -13306,41 +13849,41 @@
           </a:ln>
         </p:spPr>
         <p:txBody>
-          <a:bodyPr anchorCtr="0" anchor="ctr" bIns="0" lIns="0" spcFirstLastPara="1" rIns="0" wrap="square" tIns="0">
-            <a:noAutofit/>
-          </a:bodyPr>
-          <a:lstStyle/>
-          <a:p>
-            <a:pPr indent="0" lvl="0" marL="0" marR="0" rtl="0" algn="ctr">
-              <a:lnSpc>
-                <a:spcPct val="100000"/>
-              </a:lnSpc>
-              <a:spcBef>
-                <a:spcPts val="0"/>
-              </a:spcBef>
-              <a:spcAft>
-                <a:spcPts val="0"/>
-              </a:spcAft>
-              <a:buClr>
-                <a:schemeClr val="lt1"/>
-              </a:buClr>
-              <a:buSzPts val="1600"/>
+          <a:bodyPr anchorCtr="0" anchor="t" bIns="0" lIns="0" spcFirstLastPara="1" rIns="0" wrap="square" tIns="0">
+            <a:noAutofit/>
+          </a:bodyPr>
+          <a:lstStyle/>
+          <a:p>
+            <a:pPr indent="0" lvl="0" marL="0" marR="0" rtl="0" algn="l">
+              <a:lnSpc>
+                <a:spcPct val="100000"/>
+              </a:lnSpc>
+              <a:spcBef>
+                <a:spcPts val="0"/>
+              </a:spcBef>
+              <a:spcAft>
+                <a:spcPts val="0"/>
+              </a:spcAft>
+              <a:buClr>
+                <a:schemeClr val="dk1"/>
+              </a:buClr>
+              <a:buSzPts val="1400"/>
               <a:buFont typeface="Calibri"/>
               <a:buNone/>
             </a:pPr>
             <a:r>
-              <a:rPr b="1" i="0" lang="en-US" sz="1600" u="none" cap="none" strike="noStrike">
-                <a:solidFill>
-                  <a:schemeClr val="lt1"/>
+              <a:rPr b="0" i="0" lang="en-US" sz="1400" u="none" cap="none" strike="noStrike">
+                <a:solidFill>
+                  <a:schemeClr val="dk1"/>
                 </a:solidFill>
                 <a:latin typeface="Calibri"/>
                 <a:ea typeface="Calibri"/>
                 <a:cs typeface="Calibri"/>
                 <a:sym typeface="Calibri"/>
               </a:rPr>
-              <a:t>2</a:t>
-            </a:r>
-            <a:endParaRPr b="0" i="0" sz="1600" u="none" cap="none" strike="noStrike">
+              <a:t>A cited claim for every statement, a reviewer agent and automated validation</a:t>
+            </a:r>
+            <a:endParaRPr b="0" i="0" sz="1400" u="none" cap="none" strike="noStrike">
               <a:solidFill>
                 <a:schemeClr val="dk1"/>
               </a:solidFill>
@@ -13354,579 +13897,7 @@
       </p:sp>
       <p:sp>
         <p:nvSpPr>
-          <p:cNvPr id="320" name="Google Shape;320;p12"/>
-          <p:cNvSpPr txBox="1"/>
-          <p:nvPr/>
-        </p:nvSpPr>
-        <p:spPr>
-          <a:xfrm>
-            <a:off x="3520440" y="2331720"/>
-            <a:ext cx="2103120" cy="640080"/>
-          </a:xfrm>
-          <a:prstGeom prst="rect">
-            <a:avLst/>
-          </a:prstGeom>
-          <a:noFill/>
-          <a:ln>
-            <a:noFill/>
-          </a:ln>
-        </p:spPr>
-        <p:txBody>
-          <a:bodyPr anchorCtr="0" anchor="t" bIns="0" lIns="0" spcFirstLastPara="1" rIns="0" wrap="square" tIns="0">
-            <a:noAutofit/>
-          </a:bodyPr>
-          <a:lstStyle/>
-          <a:p>
-            <a:pPr indent="0" lvl="0" marL="0" marR="0" rtl="0" algn="l">
-              <a:lnSpc>
-                <a:spcPct val="100000"/>
-              </a:lnSpc>
-              <a:spcBef>
-                <a:spcPts val="0"/>
-              </a:spcBef>
-              <a:spcAft>
-                <a:spcPts val="0"/>
-              </a:spcAft>
-              <a:buClr>
-                <a:schemeClr val="dk2"/>
-              </a:buClr>
-              <a:buSzPts val="1800"/>
-              <a:buFont typeface="Calibri"/>
-              <a:buNone/>
-            </a:pPr>
-            <a:r>
-              <a:rPr b="1" i="0" lang="en-US" sz="1800" u="none" cap="none" strike="noStrike">
-                <a:solidFill>
-                  <a:schemeClr val="dk2"/>
-                </a:solidFill>
-                <a:latin typeface="Calibri"/>
-                <a:ea typeface="Calibri"/>
-                <a:cs typeface="Calibri"/>
-                <a:sym typeface="Calibri"/>
-              </a:rPr>
-              <a:t>Copilot bui</a:t>
-            </a:r>
-            <a:r>
-              <a:rPr b="1" lang="en-US" sz="1800">
-                <a:solidFill>
-                  <a:schemeClr val="dk2"/>
-                </a:solidFill>
-                <a:latin typeface="Calibri"/>
-                <a:ea typeface="Calibri"/>
-                <a:cs typeface="Calibri"/>
-                <a:sym typeface="Calibri"/>
-              </a:rPr>
-              <a:t>lds</a:t>
-            </a:r>
-            <a:r>
-              <a:rPr b="1" i="0" lang="en-US" sz="1800" u="none" cap="none" strike="noStrike">
-                <a:solidFill>
-                  <a:schemeClr val="dk2"/>
-                </a:solidFill>
-                <a:latin typeface="Calibri"/>
-                <a:ea typeface="Calibri"/>
-                <a:cs typeface="Calibri"/>
-                <a:sym typeface="Calibri"/>
-              </a:rPr>
-              <a:t> from it</a:t>
-            </a:r>
-            <a:endParaRPr b="0" i="0" sz="1800" u="none" cap="none" strike="noStrike">
-              <a:solidFill>
-                <a:schemeClr val="dk1"/>
-              </a:solidFill>
-              <a:latin typeface="Calibri"/>
-              <a:ea typeface="Calibri"/>
-              <a:cs typeface="Calibri"/>
-              <a:sym typeface="Calibri"/>
-            </a:endParaRPr>
-          </a:p>
-        </p:txBody>
-      </p:sp>
-      <p:sp>
-        <p:nvSpPr>
-          <p:cNvPr id="321" name="Google Shape;321;p12"/>
-          <p:cNvSpPr txBox="1"/>
-          <p:nvPr/>
-        </p:nvSpPr>
-        <p:spPr>
-          <a:xfrm>
-            <a:off x="3520440" y="3017520"/>
-            <a:ext cx="2103120" cy="731520"/>
-          </a:xfrm>
-          <a:prstGeom prst="rect">
-            <a:avLst/>
-          </a:prstGeom>
-          <a:noFill/>
-          <a:ln>
-            <a:noFill/>
-          </a:ln>
-        </p:spPr>
-        <p:txBody>
-          <a:bodyPr anchorCtr="0" anchor="t" bIns="0" lIns="0" spcFirstLastPara="1" rIns="0" wrap="square" tIns="0">
-            <a:noAutofit/>
-          </a:bodyPr>
-          <a:lstStyle/>
-          <a:p>
-            <a:pPr indent="0" lvl="0" marL="0" marR="0" rtl="0" algn="l">
-              <a:lnSpc>
-                <a:spcPct val="100000"/>
-              </a:lnSpc>
-              <a:spcBef>
-                <a:spcPts val="0"/>
-              </a:spcBef>
-              <a:spcAft>
-                <a:spcPts val="0"/>
-              </a:spcAft>
-              <a:buClr>
-                <a:schemeClr val="dk1"/>
-              </a:buClr>
-              <a:buSzPts val="1400"/>
-              <a:buFont typeface="Calibri"/>
-              <a:buNone/>
-            </a:pPr>
-            <a:r>
-              <a:rPr b="0" i="0" lang="en-US" sz="1400" u="none" cap="none" strike="noStrike">
-                <a:solidFill>
-                  <a:schemeClr val="dk1"/>
-                </a:solidFill>
-                <a:latin typeface="Calibri"/>
-                <a:ea typeface="Calibri"/>
-                <a:cs typeface="Calibri"/>
-                <a:sym typeface="Calibri"/>
-              </a:rPr>
-              <a:t>The blueprint </a:t>
-            </a:r>
-            <a:r>
-              <a:rPr lang="en-US">
-                <a:solidFill>
-                  <a:schemeClr val="dk1"/>
-                </a:solidFill>
-                <a:latin typeface="Calibri"/>
-                <a:ea typeface="Calibri"/>
-                <a:cs typeface="Calibri"/>
-                <a:sym typeface="Calibri"/>
-              </a:rPr>
-              <a:t>guides</a:t>
-            </a:r>
-            <a:r>
-              <a:rPr lang="en-US">
-                <a:solidFill>
-                  <a:schemeClr val="dk1"/>
-                </a:solidFill>
-                <a:latin typeface="Calibri"/>
-                <a:ea typeface="Calibri"/>
-                <a:cs typeface="Calibri"/>
-                <a:sym typeface="Calibri"/>
-              </a:rPr>
-              <a:t> </a:t>
-            </a:r>
-            <a:r>
-              <a:rPr b="0" i="0" lang="en-US" sz="1400" u="none" cap="none" strike="noStrike">
-                <a:solidFill>
-                  <a:schemeClr val="dk1"/>
-                </a:solidFill>
-                <a:latin typeface="Calibri"/>
-                <a:ea typeface="Calibri"/>
-                <a:cs typeface="Calibri"/>
-                <a:sym typeface="Calibri"/>
-              </a:rPr>
-              <a:t>generation of the new code</a:t>
-            </a:r>
-            <a:endParaRPr b="0" i="0" sz="1400" u="none" cap="none" strike="noStrike">
-              <a:solidFill>
-                <a:schemeClr val="dk1"/>
-              </a:solidFill>
-              <a:latin typeface="Calibri"/>
-              <a:ea typeface="Calibri"/>
-              <a:cs typeface="Calibri"/>
-              <a:sym typeface="Calibri"/>
-            </a:endParaRPr>
-          </a:p>
-        </p:txBody>
-      </p:sp>
-      <p:sp>
-        <p:nvSpPr>
-          <p:cNvPr id="322" name="Google Shape;322;p12"/>
-          <p:cNvSpPr/>
-          <p:nvPr/>
-        </p:nvSpPr>
-        <p:spPr>
-          <a:xfrm>
-            <a:off x="5870448" y="2468880"/>
-            <a:ext cx="237744" cy="274320"/>
-          </a:xfrm>
-          <a:prstGeom prst="rightArrow">
-            <a:avLst>
-              <a:gd fmla="val 50000" name="adj1"/>
-              <a:gd fmla="val 50000" name="adj2"/>
-            </a:avLst>
-          </a:prstGeom>
-          <a:solidFill>
-            <a:schemeClr val="accent2"/>
-          </a:solidFill>
-          <a:ln>
-            <a:noFill/>
-          </a:ln>
-        </p:spPr>
-        <p:txBody>
-          <a:bodyPr anchorCtr="0" anchor="ctr" bIns="91425" lIns="91425" spcFirstLastPara="1" rIns="91425" wrap="square" tIns="91425">
-            <a:noAutofit/>
-          </a:bodyPr>
-          <a:lstStyle/>
-          <a:p>
-            <a:pPr indent="0" lvl="0" marL="0" marR="0" rtl="0" algn="l">
-              <a:lnSpc>
-                <a:spcPct val="100000"/>
-              </a:lnSpc>
-              <a:spcBef>
-                <a:spcPts val="0"/>
-              </a:spcBef>
-              <a:spcAft>
-                <a:spcPts val="0"/>
-              </a:spcAft>
-              <a:buClr>
-                <a:srgbClr val="000000"/>
-              </a:buClr>
-              <a:buSzPts val="1400"/>
-              <a:buFont typeface="Arial"/>
-              <a:buNone/>
-            </a:pPr>
-            <a:r>
-              <a:t/>
-            </a:r>
-            <a:endParaRPr b="0" i="0" sz="1400" u="none" cap="none" strike="noStrike">
-              <a:solidFill>
-                <a:srgbClr val="000000"/>
-              </a:solidFill>
-              <a:latin typeface="Arial"/>
-              <a:ea typeface="Arial"/>
-              <a:cs typeface="Arial"/>
-              <a:sym typeface="Arial"/>
-            </a:endParaRPr>
-          </a:p>
-        </p:txBody>
-      </p:sp>
-      <p:sp>
-        <p:nvSpPr>
-          <p:cNvPr id="323" name="Google Shape;323;p12"/>
-          <p:cNvSpPr/>
-          <p:nvPr/>
-        </p:nvSpPr>
-        <p:spPr>
-          <a:xfrm>
-            <a:off x="6126480" y="1463040"/>
-            <a:ext cx="2560320" cy="2377440"/>
-          </a:xfrm>
-          <a:prstGeom prst="roundRect">
-            <a:avLst>
-              <a:gd fmla="val 3077" name="adj"/>
-            </a:avLst>
-          </a:prstGeom>
-          <a:solidFill>
-            <a:schemeClr val="lt2"/>
-          </a:solidFill>
-          <a:ln>
-            <a:noFill/>
-          </a:ln>
-        </p:spPr>
-        <p:txBody>
-          <a:bodyPr anchorCtr="0" anchor="ctr" bIns="91425" lIns="91425" spcFirstLastPara="1" rIns="91425" wrap="square" tIns="91425">
-            <a:noAutofit/>
-          </a:bodyPr>
-          <a:lstStyle/>
-          <a:p>
-            <a:pPr indent="0" lvl="0" marL="0" marR="0" rtl="0" algn="l">
-              <a:lnSpc>
-                <a:spcPct val="100000"/>
-              </a:lnSpc>
-              <a:spcBef>
-                <a:spcPts val="0"/>
-              </a:spcBef>
-              <a:spcAft>
-                <a:spcPts val="0"/>
-              </a:spcAft>
-              <a:buClr>
-                <a:srgbClr val="000000"/>
-              </a:buClr>
-              <a:buSzPts val="1400"/>
-              <a:buFont typeface="Arial"/>
-              <a:buNone/>
-            </a:pPr>
-            <a:r>
-              <a:t/>
-            </a:r>
-            <a:endParaRPr b="0" i="0" sz="1400" u="none" cap="none" strike="noStrike">
-              <a:solidFill>
-                <a:srgbClr val="000000"/>
-              </a:solidFill>
-              <a:latin typeface="Arial"/>
-              <a:ea typeface="Arial"/>
-              <a:cs typeface="Arial"/>
-              <a:sym typeface="Arial"/>
-            </a:endParaRPr>
-          </a:p>
-        </p:txBody>
-      </p:sp>
-      <p:sp>
-        <p:nvSpPr>
-          <p:cNvPr id="324" name="Google Shape;324;p12"/>
-          <p:cNvSpPr/>
-          <p:nvPr/>
-        </p:nvSpPr>
-        <p:spPr>
-          <a:xfrm>
-            <a:off x="6355080" y="1691640"/>
-            <a:ext cx="457200" cy="457200"/>
-          </a:xfrm>
-          <a:prstGeom prst="ellipse">
-            <a:avLst/>
-          </a:prstGeom>
-          <a:solidFill>
-            <a:schemeClr val="accent3"/>
-          </a:solidFill>
-          <a:ln>
-            <a:noFill/>
-          </a:ln>
-        </p:spPr>
-        <p:txBody>
-          <a:bodyPr anchorCtr="0" anchor="ctr" bIns="91425" lIns="91425" spcFirstLastPara="1" rIns="91425" wrap="square" tIns="91425">
-            <a:noAutofit/>
-          </a:bodyPr>
-          <a:lstStyle/>
-          <a:p>
-            <a:pPr indent="0" lvl="0" marL="0" marR="0" rtl="0" algn="l">
-              <a:lnSpc>
-                <a:spcPct val="100000"/>
-              </a:lnSpc>
-              <a:spcBef>
-                <a:spcPts val="0"/>
-              </a:spcBef>
-              <a:spcAft>
-                <a:spcPts val="0"/>
-              </a:spcAft>
-              <a:buClr>
-                <a:srgbClr val="000000"/>
-              </a:buClr>
-              <a:buSzPts val="1400"/>
-              <a:buFont typeface="Arial"/>
-              <a:buNone/>
-            </a:pPr>
-            <a:r>
-              <a:t/>
-            </a:r>
-            <a:endParaRPr b="0" i="0" sz="1400" u="none" cap="none" strike="noStrike">
-              <a:solidFill>
-                <a:srgbClr val="000000"/>
-              </a:solidFill>
-              <a:latin typeface="Arial"/>
-              <a:ea typeface="Arial"/>
-              <a:cs typeface="Arial"/>
-              <a:sym typeface="Arial"/>
-            </a:endParaRPr>
-          </a:p>
-        </p:txBody>
-      </p:sp>
-      <p:sp>
-        <p:nvSpPr>
-          <p:cNvPr id="325" name="Google Shape;325;p12"/>
-          <p:cNvSpPr txBox="1"/>
-          <p:nvPr/>
-        </p:nvSpPr>
-        <p:spPr>
-          <a:xfrm>
-            <a:off x="6355080" y="1691640"/>
-            <a:ext cx="457200" cy="457200"/>
-          </a:xfrm>
-          <a:prstGeom prst="rect">
-            <a:avLst/>
-          </a:prstGeom>
-          <a:noFill/>
-          <a:ln>
-            <a:noFill/>
-          </a:ln>
-        </p:spPr>
-        <p:txBody>
-          <a:bodyPr anchorCtr="0" anchor="ctr" bIns="0" lIns="0" spcFirstLastPara="1" rIns="0" wrap="square" tIns="0">
-            <a:noAutofit/>
-          </a:bodyPr>
-          <a:lstStyle/>
-          <a:p>
-            <a:pPr indent="0" lvl="0" marL="0" marR="0" rtl="0" algn="ctr">
-              <a:lnSpc>
-                <a:spcPct val="100000"/>
-              </a:lnSpc>
-              <a:spcBef>
-                <a:spcPts val="0"/>
-              </a:spcBef>
-              <a:spcAft>
-                <a:spcPts val="0"/>
-              </a:spcAft>
-              <a:buClr>
-                <a:schemeClr val="lt1"/>
-              </a:buClr>
-              <a:buSzPts val="1600"/>
-              <a:buFont typeface="Calibri"/>
-              <a:buNone/>
-            </a:pPr>
-            <a:r>
-              <a:rPr b="1" i="0" lang="en-US" sz="1600" u="none" cap="none" strike="noStrike">
-                <a:solidFill>
-                  <a:schemeClr val="lt1"/>
-                </a:solidFill>
-                <a:latin typeface="Calibri"/>
-                <a:ea typeface="Calibri"/>
-                <a:cs typeface="Calibri"/>
-                <a:sym typeface="Calibri"/>
-              </a:rPr>
-              <a:t>3</a:t>
-            </a:r>
-            <a:endParaRPr b="0" i="0" sz="1600" u="none" cap="none" strike="noStrike">
-              <a:solidFill>
-                <a:schemeClr val="dk1"/>
-              </a:solidFill>
-              <a:latin typeface="Calibri"/>
-              <a:ea typeface="Calibri"/>
-              <a:cs typeface="Calibri"/>
-              <a:sym typeface="Calibri"/>
-            </a:endParaRPr>
-          </a:p>
-        </p:txBody>
-      </p:sp>
-      <p:sp>
-        <p:nvSpPr>
-          <p:cNvPr id="326" name="Google Shape;326;p12"/>
-          <p:cNvSpPr txBox="1"/>
-          <p:nvPr/>
-        </p:nvSpPr>
-        <p:spPr>
-          <a:xfrm>
-            <a:off x="6355080" y="2331720"/>
-            <a:ext cx="2103120" cy="640080"/>
-          </a:xfrm>
-          <a:prstGeom prst="rect">
-            <a:avLst/>
-          </a:prstGeom>
-          <a:noFill/>
-          <a:ln>
-            <a:noFill/>
-          </a:ln>
-        </p:spPr>
-        <p:txBody>
-          <a:bodyPr anchorCtr="0" anchor="t" bIns="0" lIns="0" spcFirstLastPara="1" rIns="0" wrap="square" tIns="0">
-            <a:noAutofit/>
-          </a:bodyPr>
-          <a:lstStyle/>
-          <a:p>
-            <a:pPr indent="0" lvl="0" marL="0" marR="0" rtl="0" algn="l">
-              <a:lnSpc>
-                <a:spcPct val="100000"/>
-              </a:lnSpc>
-              <a:spcBef>
-                <a:spcPts val="0"/>
-              </a:spcBef>
-              <a:spcAft>
-                <a:spcPts val="0"/>
-              </a:spcAft>
-              <a:buClr>
-                <a:schemeClr val="dk2"/>
-              </a:buClr>
-              <a:buSzPts val="1800"/>
-              <a:buFont typeface="Calibri"/>
-              <a:buNone/>
-            </a:pPr>
-            <a:r>
-              <a:rPr b="1" i="0" lang="en-US" sz="1800" u="none" cap="none" strike="noStrike">
-                <a:solidFill>
-                  <a:schemeClr val="dk2"/>
-                </a:solidFill>
-                <a:latin typeface="Calibri"/>
-                <a:ea typeface="Calibri"/>
-                <a:cs typeface="Calibri"/>
-                <a:sym typeface="Calibri"/>
-              </a:rPr>
-              <a:t>Metadata drives ingestion</a:t>
-            </a:r>
-            <a:endParaRPr b="0" i="0" sz="1800" u="none" cap="none" strike="noStrike">
-              <a:solidFill>
-                <a:schemeClr val="dk1"/>
-              </a:solidFill>
-              <a:latin typeface="Calibri"/>
-              <a:ea typeface="Calibri"/>
-              <a:cs typeface="Calibri"/>
-              <a:sym typeface="Calibri"/>
-            </a:endParaRPr>
-          </a:p>
-        </p:txBody>
-      </p:sp>
-      <p:sp>
-        <p:nvSpPr>
-          <p:cNvPr id="327" name="Google Shape;327;p12"/>
-          <p:cNvSpPr txBox="1"/>
-          <p:nvPr/>
-        </p:nvSpPr>
-        <p:spPr>
-          <a:xfrm>
-            <a:off x="6355080" y="3017520"/>
-            <a:ext cx="2103120" cy="731520"/>
-          </a:xfrm>
-          <a:prstGeom prst="rect">
-            <a:avLst/>
-          </a:prstGeom>
-          <a:noFill/>
-          <a:ln>
-            <a:noFill/>
-          </a:ln>
-        </p:spPr>
-        <p:txBody>
-          <a:bodyPr anchorCtr="0" anchor="t" bIns="0" lIns="0" spcFirstLastPara="1" rIns="0" wrap="square" tIns="0">
-            <a:noAutofit/>
-          </a:bodyPr>
-          <a:lstStyle/>
-          <a:p>
-            <a:pPr indent="0" lvl="0" marL="0" marR="0" rtl="0" algn="l">
-              <a:lnSpc>
-                <a:spcPct val="100000"/>
-              </a:lnSpc>
-              <a:spcBef>
-                <a:spcPts val="0"/>
-              </a:spcBef>
-              <a:spcAft>
-                <a:spcPts val="0"/>
-              </a:spcAft>
-              <a:buClr>
-                <a:schemeClr val="dk1"/>
-              </a:buClr>
-              <a:buSzPts val="1400"/>
-              <a:buFont typeface="Calibri"/>
-              <a:buNone/>
-            </a:pPr>
-            <a:r>
-              <a:rPr b="0" i="0" lang="en-US" sz="1400" u="none" cap="none" strike="noStrike">
-                <a:solidFill>
-                  <a:schemeClr val="dk1"/>
-                </a:solidFill>
-                <a:latin typeface="Calibri"/>
-                <a:ea typeface="Calibri"/>
-                <a:cs typeface="Calibri"/>
-                <a:sym typeface="Calibri"/>
-              </a:rPr>
-              <a:t>Findings feed metadata-driven ingestion directly</a:t>
-            </a:r>
-            <a:endParaRPr b="0" i="0" sz="1400" u="none" cap="none" strike="noStrike">
-              <a:solidFill>
-                <a:schemeClr val="dk1"/>
-              </a:solidFill>
-              <a:latin typeface="Calibri"/>
-              <a:ea typeface="Calibri"/>
-              <a:cs typeface="Calibri"/>
-              <a:sym typeface="Calibri"/>
-            </a:endParaRPr>
-          </a:p>
-        </p:txBody>
-      </p:sp>
-      <p:sp>
-        <p:nvSpPr>
-          <p:cNvPr id="328" name="Google Shape;328;p12"/>
+          <p:cNvPr id="328" name="Google Shape;328;p14"/>
           <p:cNvSpPr txBox="1"/>
           <p:nvPr>
             <p:ph idx="4294967295" type="sldNum"/>
@@ -15230,7 +15201,19 @@
                 <a:cs typeface="Calibri"/>
                 <a:sym typeface="Calibri"/>
               </a:rPr>
-              <a:t>Steve Moody  |  Portland Data + AI Meetup</a:t>
+              <a:t>Steve Moody  |  </a:t>
+            </a:r>
+            <a:r>
+              <a:rPr lang="en-US">
+                <a:solidFill>
+                  <a:schemeClr val="lt2"/>
+                </a:solidFill>
+                <a:latin typeface="Calibri"/>
+                <a:ea typeface="Calibri"/>
+                <a:cs typeface="Calibri"/>
+                <a:sym typeface="Calibri"/>
+              </a:rPr>
+              <a:t>github.com/SteveMoodyData/skills-demo</a:t>
             </a:r>
             <a:endParaRPr b="0" i="0" sz="1400" u="none" cap="none" strike="noStrike">
               <a:solidFill>
@@ -15250,13 +15233,12 @@
           <p:cNvPicPr preferRelativeResize="0"/>
           <p:nvPr/>
         </p:nvPicPr>
-        <p:blipFill>
+        <p:blipFill rotWithShape="1">
           <a:blip r:embed="rId3">
             <a:alphaModFix/>
           </a:blip>
-          <a:stretch>
-            <a:fillRect/>
-          </a:stretch>
+          <a:srcRect b="0" l="0" r="0" t="0"/>
+          <a:stretch/>
         </p:blipFill>
         <p:spPr>
           <a:xfrm>
@@ -15297,17 +15279,25 @@
           </a:bodyPr>
           <a:lstStyle/>
           <a:p>
-            <a:pPr indent="0" lvl="0" marL="0" rtl="0" algn="l">
-              <a:spcBef>
-                <a:spcPts val="0"/>
-              </a:spcBef>
-              <a:spcAft>
-                <a:spcPts val="0"/>
-              </a:spcAft>
-              <a:buNone/>
-            </a:pPr>
-            <a:r>
-              <a:rPr lang="en-US" sz="1500">
+            <a:pPr indent="0" lvl="0" marL="0" marR="0" rtl="0" algn="l">
+              <a:lnSpc>
+                <a:spcPct val="100000"/>
+              </a:lnSpc>
+              <a:spcBef>
+                <a:spcPts val="0"/>
+              </a:spcBef>
+              <a:spcAft>
+                <a:spcPts val="0"/>
+              </a:spcAft>
+              <a:buClr>
+                <a:srgbClr val="000000"/>
+              </a:buClr>
+              <a:buSzPts val="1500"/>
+              <a:buFont typeface="Arial"/>
+              <a:buNone/>
+            </a:pPr>
+            <a:r>
+              <a:rPr b="0" i="0" lang="en-US" sz="1500" u="none" cap="none" strike="noStrike">
                 <a:solidFill>
                   <a:schemeClr val="lt1"/>
                 </a:solidFill>
@@ -15316,33 +15306,9 @@
                 <a:cs typeface="Cambria"/>
                 <a:sym typeface="Cambria"/>
               </a:rPr>
-              <a:t>Link to demo </a:t>
-            </a:r>
-            <a:r>
-              <a:rPr lang="en-US" sz="1500">
-                <a:solidFill>
-                  <a:schemeClr val="lt1"/>
-                </a:solidFill>
-                <a:latin typeface="Cambria"/>
-                <a:ea typeface="Cambria"/>
-                <a:cs typeface="Cambria"/>
-                <a:sym typeface="Cambria"/>
-              </a:rPr>
-              <a:t>and </a:t>
-            </a:r>
-            <a:r>
-              <a:rPr lang="en-US" sz="1500">
-                <a:solidFill>
-                  <a:schemeClr val="lt1"/>
-                </a:solidFill>
-                <a:latin typeface="Cambria"/>
-                <a:ea typeface="Cambria"/>
-                <a:cs typeface="Cambria"/>
-                <a:sym typeface="Cambria"/>
-              </a:rPr>
-              <a:t>PowerPoint</a:t>
-            </a:r>
-            <a:endParaRPr sz="1500">
+              <a:t>Link to demo and PowerPoint</a:t>
+            </a:r>
+            <a:endParaRPr b="0" i="0" sz="1500" u="none" cap="none" strike="noStrike">
               <a:solidFill>
                 <a:schemeClr val="lt1"/>
               </a:solidFill>
@@ -15516,7 +15482,15 @@
               </a:rPr>
               <a:t>Steve Moody</a:t>
             </a:r>
-            <a:endParaRPr/>
+            <a:endParaRPr b="0" i="0" sz="1400" u="none" cap="none" strike="noStrike">
+              <a:solidFill>
+                <a:srgbClr val="000000"/>
+              </a:solidFill>
+              <a:latin typeface="Arial"/>
+              <a:ea typeface="Arial"/>
+              <a:cs typeface="Arial"/>
+              <a:sym typeface="Arial"/>
+            </a:endParaRPr>
           </a:p>
         </p:txBody>
       </p:sp>
@@ -15574,7 +15548,15 @@
               </a:rPr>
               <a:t>Lead Data Engineering Consultant, Concentrix</a:t>
             </a:r>
-            <a:endParaRPr/>
+            <a:endParaRPr b="0" i="0" sz="1400" u="none" cap="none" strike="noStrike">
+              <a:solidFill>
+                <a:srgbClr val="000000"/>
+              </a:solidFill>
+              <a:latin typeface="Arial"/>
+              <a:ea typeface="Arial"/>
+              <a:cs typeface="Arial"/>
+              <a:sym typeface="Arial"/>
+            </a:endParaRPr>
           </a:p>
         </p:txBody>
       </p:sp>
@@ -15617,6 +15599,11 @@
               <a:spcAft>
                 <a:spcPts val="0"/>
               </a:spcAft>
+              <a:buClr>
+                <a:srgbClr val="000000"/>
+              </a:buClr>
+              <a:buSzPts val="1400"/>
+              <a:buFont typeface="Arial"/>
               <a:buNone/>
             </a:pPr>
             <a:r>
@@ -15688,7 +15675,15 @@
               </a:rPr>
               <a:t>25+</a:t>
             </a:r>
-            <a:endParaRPr/>
+            <a:endParaRPr b="0" i="0" sz="1400" u="none" cap="none" strike="noStrike">
+              <a:solidFill>
+                <a:srgbClr val="000000"/>
+              </a:solidFill>
+              <a:latin typeface="Arial"/>
+              <a:ea typeface="Arial"/>
+              <a:cs typeface="Arial"/>
+              <a:sym typeface="Arial"/>
+            </a:endParaRPr>
           </a:p>
         </p:txBody>
       </p:sp>
@@ -15746,7 +15741,15 @@
               </a:rPr>
               <a:t>years of SQL</a:t>
             </a:r>
-            <a:endParaRPr/>
+            <a:endParaRPr b="0" i="0" sz="1400" u="none" cap="none" strike="noStrike">
+              <a:solidFill>
+                <a:srgbClr val="000000"/>
+              </a:solidFill>
+              <a:latin typeface="Arial"/>
+              <a:ea typeface="Arial"/>
+              <a:cs typeface="Arial"/>
+              <a:sym typeface="Arial"/>
+            </a:endParaRPr>
           </a:p>
         </p:txBody>
       </p:sp>
@@ -15789,6 +15792,11 @@
               <a:spcAft>
                 <a:spcPts val="0"/>
               </a:spcAft>
+              <a:buClr>
+                <a:srgbClr val="000000"/>
+              </a:buClr>
+              <a:buSzPts val="1400"/>
+              <a:buFont typeface="Arial"/>
               <a:buNone/>
             </a:pPr>
             <a:r>
@@ -15860,7 +15868,15 @@
               </a:rPr>
               <a:t>15+</a:t>
             </a:r>
-            <a:endParaRPr/>
+            <a:endParaRPr b="0" i="0" sz="1400" u="none" cap="none" strike="noStrike">
+              <a:solidFill>
+                <a:srgbClr val="000000"/>
+              </a:solidFill>
+              <a:latin typeface="Arial"/>
+              <a:ea typeface="Arial"/>
+              <a:cs typeface="Arial"/>
+              <a:sym typeface="Arial"/>
+            </a:endParaRPr>
           </a:p>
         </p:txBody>
       </p:sp>
@@ -15918,7 +15934,15 @@
               </a:rPr>
               <a:t>years in data engineering</a:t>
             </a:r>
-            <a:endParaRPr/>
+            <a:endParaRPr b="0" i="0" sz="1400" u="none" cap="none" strike="noStrike">
+              <a:solidFill>
+                <a:srgbClr val="000000"/>
+              </a:solidFill>
+              <a:latin typeface="Arial"/>
+              <a:ea typeface="Arial"/>
+              <a:cs typeface="Arial"/>
+              <a:sym typeface="Arial"/>
+            </a:endParaRPr>
           </a:p>
         </p:txBody>
       </p:sp>
@@ -15961,6 +15985,11 @@
               <a:spcAft>
                 <a:spcPts val="0"/>
               </a:spcAft>
+              <a:buClr>
+                <a:srgbClr val="000000"/>
+              </a:buClr>
+              <a:buSzPts val="1400"/>
+              <a:buFont typeface="Arial"/>
               <a:buNone/>
             </a:pPr>
             <a:r>
@@ -16032,7 +16061,15 @@
               </a:rPr>
               <a:t>10+</a:t>
             </a:r>
-            <a:endParaRPr/>
+            <a:endParaRPr b="0" i="0" sz="1400" u="none" cap="none" strike="noStrike">
+              <a:solidFill>
+                <a:srgbClr val="000000"/>
+              </a:solidFill>
+              <a:latin typeface="Arial"/>
+              <a:ea typeface="Arial"/>
+              <a:cs typeface="Arial"/>
+              <a:sym typeface="Arial"/>
+            </a:endParaRPr>
           </a:p>
         </p:txBody>
       </p:sp>
@@ -16090,7 +16127,15 @@
               </a:rPr>
               <a:t>years as a consultant</a:t>
             </a:r>
-            <a:endParaRPr/>
+            <a:endParaRPr b="0" i="0" sz="1400" u="none" cap="none" strike="noStrike">
+              <a:solidFill>
+                <a:srgbClr val="000000"/>
+              </a:solidFill>
+              <a:latin typeface="Arial"/>
+              <a:ea typeface="Arial"/>
+              <a:cs typeface="Arial"/>
+              <a:sym typeface="Arial"/>
+            </a:endParaRPr>
           </a:p>
         </p:txBody>
       </p:sp>
@@ -16133,6 +16178,11 @@
               <a:spcAft>
                 <a:spcPts val="0"/>
               </a:spcAft>
+              <a:buClr>
+                <a:srgbClr val="000000"/>
+              </a:buClr>
+              <a:buSzPts val="1400"/>
+              <a:buFont typeface="Arial"/>
               <a:buNone/>
             </a:pPr>
             <a:r>
@@ -16204,7 +16254,15 @@
               </a:rPr>
               <a:t>Currently working on</a:t>
             </a:r>
-            <a:endParaRPr/>
+            <a:endParaRPr b="0" i="0" sz="1400" u="none" cap="none" strike="noStrike">
+              <a:solidFill>
+                <a:srgbClr val="000000"/>
+              </a:solidFill>
+              <a:latin typeface="Arial"/>
+              <a:ea typeface="Arial"/>
+              <a:cs typeface="Arial"/>
+              <a:sym typeface="Arial"/>
+            </a:endParaRPr>
           </a:p>
         </p:txBody>
       </p:sp>
@@ -16262,7 +16320,15 @@
               </a:rPr>
               <a:t>Renewable energy market data platform: 14 sources, 40+ data flows</a:t>
             </a:r>
-            <a:endParaRPr/>
+            <a:endParaRPr b="0" i="0" sz="1400" u="none" cap="none" strike="noStrike">
+              <a:solidFill>
+                <a:srgbClr val="000000"/>
+              </a:solidFill>
+              <a:latin typeface="Arial"/>
+              <a:ea typeface="Arial"/>
+              <a:cs typeface="Arial"/>
+              <a:sym typeface="Arial"/>
+            </a:endParaRPr>
           </a:p>
           <a:p>
             <a:pPr indent="0" lvl="0" marL="0" marR="0" rtl="0" algn="l">
@@ -16294,7 +16360,15 @@
               </a:rPr>
               <a:t>Azure Databricks, Unity Catalog, Spark and dbt</a:t>
             </a:r>
-            <a:endParaRPr/>
+            <a:endParaRPr b="0" i="0" sz="1400" u="none" cap="none" strike="noStrike">
+              <a:solidFill>
+                <a:srgbClr val="000000"/>
+              </a:solidFill>
+              <a:latin typeface="Arial"/>
+              <a:ea typeface="Arial"/>
+              <a:cs typeface="Arial"/>
+              <a:sym typeface="Arial"/>
+            </a:endParaRPr>
           </a:p>
           <a:p>
             <a:pPr indent="0" lvl="0" marL="0" marR="0" rtl="0" algn="l">
@@ -16326,7 +16400,15 @@
               </a:rPr>
               <a:t>Past work across energy, healthcare and financial services</a:t>
             </a:r>
-            <a:endParaRPr/>
+            <a:endParaRPr b="0" i="0" sz="1400" u="none" cap="none" strike="noStrike">
+              <a:solidFill>
+                <a:srgbClr val="000000"/>
+              </a:solidFill>
+              <a:latin typeface="Arial"/>
+              <a:ea typeface="Arial"/>
+              <a:cs typeface="Arial"/>
+              <a:sym typeface="Arial"/>
+            </a:endParaRPr>
           </a:p>
         </p:txBody>
       </p:sp>
@@ -17724,7 +17806,7 @@
               <a:buNone/>
             </a:pPr>
             <a:r>
-              <a:rPr lang="en-US">
+              <a:rPr b="0" i="0" lang="en-US" sz="1400" u="none" cap="none" strike="noStrike">
                 <a:solidFill>
                   <a:schemeClr val="dk1"/>
                 </a:solidFill>
@@ -17733,7 +17815,7 @@
                 <a:cs typeface="Calibri"/>
                 <a:sym typeface="Calibri"/>
               </a:rPr>
-              <a:t>What we learned and how we’ll improve it for future projects</a:t>
+              <a:t>What we learned and how we'll improve it for future projects</a:t>
             </a:r>
             <a:endParaRPr b="0" i="0" sz="1400" u="none" cap="none" strike="noStrike">
               <a:solidFill>
@@ -18010,31 +18092,7 @@
                 <a:cs typeface="Calibri"/>
                 <a:sym typeface="Calibri"/>
               </a:rPr>
-              <a:t>A .NET and Oracle system feeding renewa</a:t>
-            </a:r>
-            <a:r>
-              <a:rPr lang="en-US" sz="1800">
-                <a:solidFill>
-                  <a:schemeClr val="accent6"/>
-                </a:solidFill>
-                <a:latin typeface="Calibri"/>
-                <a:ea typeface="Calibri"/>
-                <a:cs typeface="Calibri"/>
-                <a:sym typeface="Calibri"/>
-              </a:rPr>
-              <a:t>ble </a:t>
-            </a:r>
-            <a:r>
-              <a:rPr b="0" i="0" lang="en-US" sz="1800" u="none" cap="none" strike="noStrike">
-                <a:solidFill>
-                  <a:schemeClr val="accent6"/>
-                </a:solidFill>
-                <a:latin typeface="Calibri"/>
-                <a:ea typeface="Calibri"/>
-                <a:cs typeface="Calibri"/>
-                <a:sym typeface="Calibri"/>
-              </a:rPr>
-              <a:t>energy data application and reporting</a:t>
+              <a:t>A .NET and Oracle system feeding renewable energy data application and reporting</a:t>
             </a:r>
             <a:endParaRPr b="0" i="0" sz="1800" u="none" cap="none" strike="noStrike">
               <a:solidFill>
@@ -18745,19 +18803,7 @@
                 <a:cs typeface="Calibri"/>
                 <a:sym typeface="Calibri"/>
               </a:rPr>
-              <a:t>Oracle stored procedures containing more business logic feeding 98 </a:t>
-            </a:r>
-            <a:r>
-              <a:rPr lang="en-US" sz="1600">
-                <a:solidFill>
-                  <a:schemeClr val="dk1"/>
-                </a:solidFill>
-                <a:latin typeface="Calibri"/>
-                <a:ea typeface="Calibri"/>
-                <a:cs typeface="Calibri"/>
-                <a:sym typeface="Calibri"/>
-              </a:rPr>
-              <a:t>SSRS reports</a:t>
+              <a:t>Oracle stored procedures containing more business logic feeding 98 SSRS reports</a:t>
             </a:r>
             <a:endParaRPr b="0" i="0" sz="1600" u="none" cap="none" strike="noStrike">
               <a:solidFill>
@@ -23088,8 +23134,8 @@
         </p:nvSpPr>
         <p:spPr>
           <a:xfrm>
-            <a:off x="6126465" y="3108911"/>
-            <a:ext cx="2651700" cy="1554600"/>
+            <a:off x="6126480" y="3108960"/>
+            <a:ext cx="2651760" cy="1554480"/>
           </a:xfrm>
           <a:prstGeom prst="roundRect">
             <a:avLst>
@@ -23149,8 +23195,8 @@
         </p:nvSpPr>
         <p:spPr>
           <a:xfrm>
-            <a:off x="6309370" y="3246140"/>
-            <a:ext cx="2286000" cy="365700"/>
+            <a:off x="6309360" y="3291840"/>
+            <a:ext cx="2286000" cy="365760"/>
           </a:xfrm>
           <a:prstGeom prst="rect">
             <a:avLst/>
@@ -23215,8 +23261,8 @@
         </p:nvSpPr>
         <p:spPr>
           <a:xfrm>
-            <a:off x="6309370" y="3703340"/>
-            <a:ext cx="2286000" cy="822900"/>
+            <a:off x="6309360" y="3749040"/>
+            <a:ext cx="2286000" cy="822960"/>
           </a:xfrm>
           <a:prstGeom prst="rect">
             <a:avLst/>
